--- a/スライド/ch04.pptx
+++ b/スライド/ch04.pptx
@@ -619,13 +619,13 @@
           <a:lstStyle/>
           <a:p>
             <a:r>
-              <a:t>段階開示。②で「V_i の係数」と「V_j の係数」を色分けして板書すると、対角と非対角の由来が見える。移相器があると対称が崩れる（本講義では扱わない）。</a:t>
+              <a:t>前の 1 枚に ② を足しただけ。薄い段はまだ出していない段。</a:t>
             </a:r>
           </a:p>
           <a:p/>
           <a:p>
             <a:r>
-              <a:t>_class: sections</a:t>
+              <a:t>_class: figure-full</a:t>
             </a:r>
           </a:p>
         </p:txBody>
@@ -695,13 +695,13 @@
           <a:lstStyle/>
           <a:p>
             <a:r>
-              <a:t>段階開示。②で「V_i の係数」と「V_j の係数」を色分けして板書すると、対角と非対角の由来が見える。移相器があると対称が崩れる（本講義では扱わない）。</a:t>
+              <a:t>前の 1 枚に ③ を足しただけ。薄い段はまだ出していない段。</a:t>
             </a:r>
           </a:p>
           <a:p/>
           <a:p>
             <a:r>
-              <a:t>_class: sections</a:t>
+              <a:t>_class: figure-full</a:t>
             </a:r>
           </a:p>
         </p:txBody>
@@ -1151,7 +1151,7 @@
           <a:p/>
           <a:p>
             <a:r>
-              <a:t>_class: sections</a:t>
+              <a:t>_class: figure-full</a:t>
             </a:r>
           </a:p>
         </p:txBody>
@@ -1221,13 +1221,13 @@
           <a:lstStyle/>
           <a:p>
             <a:r>
-              <a:t>段階開示。②の共役で Y_ij* = G − jB になる符号に注意。③は板書で 1 行ずつ。2 母線・無損失にすると第3回の P = V_sV_r sinδ/X に戻ることを確認させる。</a:t>
+              <a:t>前の 1 枚に ② を足しただけ。薄い段はまだ出していない段。</a:t>
             </a:r>
           </a:p>
           <a:p/>
           <a:p>
             <a:r>
-              <a:t>_class: sections</a:t>
+              <a:t>_class: figure-full</a:t>
             </a:r>
           </a:p>
         </p:txBody>
@@ -1297,13 +1297,13 @@
           <a:lstStyle/>
           <a:p>
             <a:r>
-              <a:t>段階開示。②の共役で Y_ij* = G − jB になる符号に注意。③は板書で 1 行ずつ。2 母線・無損失にすると第3回の P = V_sV_r sinδ/X に戻ることを確認させる。</a:t>
+              <a:t>前の 1 枚に ③ を足しただけ。薄い段はまだ出していない段。</a:t>
             </a:r>
           </a:p>
           <a:p/>
           <a:p>
             <a:r>
-              <a:t>_class: sections</a:t>
+              <a:t>_class: figure-full</a:t>
             </a:r>
           </a:p>
         </p:txBody>
@@ -2355,7 +2355,7 @@
           <a:p/>
           <a:p>
             <a:r>
-              <a:t>_class: sections</a:t>
+              <a:t>_class: figure-full</a:t>
             </a:r>
           </a:p>
         </p:txBody>
@@ -2425,13 +2425,13 @@
           <a:lstStyle/>
           <a:p>
             <a:r>
-              <a:t>段階開示。「直流法」は直流送電の話ではなく、V ↔ δ、I ↔ P、R ↔ X の対応で直流回路と同じ式になるから。Q・電圧・損失は出ない。</a:t>
+              <a:t>前の 1 枚に ② を足しただけ。薄い段はまだ出していない段。</a:t>
             </a:r>
           </a:p>
           <a:p/>
           <a:p>
             <a:r>
-              <a:t>_class: sections</a:t>
+              <a:t>_class: figure-full</a:t>
             </a:r>
           </a:p>
         </p:txBody>
@@ -2501,13 +2501,13 @@
           <a:lstStyle/>
           <a:p>
             <a:r>
-              <a:t>段階開示。「直流法」は直流送電の話ではなく、V ↔ δ、I ↔ P、R ↔ X の対応で直流回路と同じ式になるから。Q・電圧・損失は出ない。</a:t>
+              <a:t>前の 1 枚に ③ を足しただけ。薄い段はまだ出していない段。</a:t>
             </a:r>
           </a:p>
           <a:p/>
           <a:p>
             <a:r>
-              <a:t>_class: sections</a:t>
+              <a:t>_class: figure-full</a:t>
             </a:r>
           </a:p>
         </p:txBody>
@@ -3605,7 +3605,7 @@
           <a:p/>
           <a:p>
             <a:r>
-              <a:t>_class: sections</a:t>
+              <a:t>_class: figure-full</a:t>
             </a:r>
           </a:p>
         </p:txBody>
@@ -7566,59 +7566,14 @@
       <p:grpSpPr/>
       <p:sp>
         <p:nvSpPr>
-          <p:cNvPr id="2" name="TextBox 1"/>
+          <p:cNvPr id="2" name="edge:title"/>
           <p:cNvSpPr txBox="1"/>
           <p:nvPr/>
         </p:nvSpPr>
         <p:spPr>
           <a:xfrm>
-            <a:off x="566928" y="457200"/>
-            <a:ext cx="11057839" cy="658368"/>
-          </a:xfrm>
-          <a:prstGeom prst="rect">
-            <a:avLst/>
-          </a:prstGeom>
-          <a:noFill/>
-        </p:spPr>
-        <p:txBody>
-          <a:bodyPr wrap="square" lIns="0" rIns="0" tIns="0" bIns="0" anchor="ctr">
-            <a:noAutofit/>
-          </a:bodyPr>
-          <a:lstStyle/>
-          <a:p>
-            <a:pPr>
-              <a:lnSpc>
-                <a:spcPct val="106000"/>
-              </a:lnSpc>
-              <a:defRPr sz="3390" b="1">
-                <a:solidFill>
-                  <a:srgbClr val="7C332A"/>
-                </a:solidFill>
-                <a:latin typeface="Avenir Next"/>
-                <a:ea typeface="Hiragino Sans"/>
-                <a:cs typeface="Hiragino Sans"/>
-              </a:defRPr>
-            </a:pPr>
-            <a:r>
-              <a:rPr>
-                <a:ea typeface="Hiragino Sans"/>
-                <a:cs typeface="Hiragino Sans"/>
-              </a:rPr>
-              <a:t>導出 — キルヒホッフの電流則から I = Y_bus V</a:t>
-            </a:r>
-          </a:p>
-        </p:txBody>
-      </p:sp>
-      <p:sp>
-        <p:nvSpPr>
-          <p:cNvPr id="3" name="TextBox 2"/>
-          <p:cNvSpPr txBox="1"/>
-          <p:nvPr/>
-        </p:nvSpPr>
-        <p:spPr>
-          <a:xfrm>
-            <a:off x="566928" y="2229993"/>
-            <a:ext cx="11057839" cy="254000"/>
+            <a:off x="566928" y="146304"/>
+            <a:ext cx="11057839" cy="457200"/>
           </a:xfrm>
           <a:prstGeom prst="rect">
             <a:avLst/>
@@ -7631,30 +7586,60 @@
           </a:bodyPr>
           <a:lstStyle/>
           <a:p>
-            <a:r>
-              <a:rPr sz="1600" b="1">
-                <a:solidFill>
-                  <a:srgbClr val="5C7268"/>
-                </a:solidFill>
-                <a:latin typeface="Avenir Next"/>
-                <a:ea typeface="Hiragino Sans"/>
-                <a:cs typeface="Hiragino Sans"/>
-              </a:rPr>
-              <a:t>① 線路の電流｜母線 i から j へ I_ij = y_ij (V_i − V_j)</a:t>
-            </a:r>
-          </a:p>
-        </p:txBody>
-      </p:sp>
-      <p:sp>
-        <p:nvSpPr>
-          <p:cNvPr id="4" name="TextBox 3"/>
+            <a:pPr>
+              <a:defRPr sz="2400" b="1">
+                <a:solidFill>
+                  <a:srgbClr val="7C332A"/>
+                </a:solidFill>
+                <a:latin typeface="Avenir Next"/>
+                <a:ea typeface="Hiragino Sans"/>
+                <a:cs typeface="Hiragino Sans"/>
+              </a:defRPr>
+            </a:pPr>
+            <a:r>
+              <a:rPr>
+                <a:ea typeface="Hiragino Sans"/>
+                <a:cs typeface="Hiragino Sans"/>
+              </a:rPr>
+              <a:t>導出 — キルヒホッフの電流則から I = Y_bus V</a:t>
+            </a:r>
+          </a:p>
+        </p:txBody>
+      </p:sp>
+      <p:pic>
+        <p:nvPicPr>
+          <p:cNvPr id="3" name="Picture 2" descr="ch04_deriv_ybus_2.png"/>
+          <p:cNvPicPr>
+            <a:picLocks noChangeAspect="1"/>
+          </p:cNvPicPr>
+          <p:nvPr/>
+        </p:nvPicPr>
+        <p:blipFill>
+          <a:blip r:embed="rId2"/>
+          <a:stretch>
+            <a:fillRect/>
+          </a:stretch>
+        </p:blipFill>
+        <p:spPr>
+          <a:xfrm>
+            <a:off x="762110" y="713232"/>
+            <a:ext cx="10667474" cy="5322316"/>
+          </a:xfrm>
+          <a:prstGeom prst="rect">
+            <a:avLst/>
+          </a:prstGeom>
+        </p:spPr>
+      </p:pic>
+      <p:sp>
+        <p:nvSpPr>
+          <p:cNvPr id="4" name="edge:caption"/>
           <p:cNvSpPr txBox="1"/>
           <p:nvPr/>
         </p:nvSpPr>
         <p:spPr>
           <a:xfrm>
-            <a:off x="822960" y="2522093"/>
-            <a:ext cx="10801807" cy="385762"/>
+            <a:off x="228600" y="6090412"/>
+            <a:ext cx="11734495" cy="520700"/>
           </a:xfrm>
           <a:prstGeom prst="rect">
             <a:avLst/>
@@ -7667,336 +7652,24 @@
           </a:bodyPr>
           <a:lstStyle/>
           <a:p>
-            <a:pPr>
-              <a:lnSpc>
-                <a:spcPct val="130000"/>
-              </a:lnSpc>
-            </a:pPr>
-            <a:r>
-              <a:rPr sz="1500">
-                <a:solidFill>
-                  <a:srgbClr val="33221E"/>
-                </a:solidFill>
-                <a:latin typeface="Avenir Next"/>
-                <a:ea typeface="Hiragino Sans"/>
-                <a:cs typeface="Hiragino Sans"/>
-              </a:rPr>
-              <a:t>線路は直列アドミタンス y_ij = 1/z_ij。両端の電圧差に比例した電流が流れる（オームの法則）。</a:t>
-            </a:r>
-          </a:p>
-        </p:txBody>
-      </p:sp>
-      <p:sp>
-        <p:nvSpPr>
-          <p:cNvPr id="5" name="Rectangle 4"/>
-          <p:cNvSpPr/>
-          <p:nvPr/>
-        </p:nvSpPr>
-        <p:spPr>
-          <a:xfrm>
-            <a:off x="566928" y="3059747"/>
-            <a:ext cx="11057839" cy="9525"/>
-          </a:xfrm>
-          <a:prstGeom prst="rect">
-            <a:avLst/>
-          </a:prstGeom>
-          <a:solidFill>
-            <a:srgbClr val="E5DCCE"/>
-          </a:solidFill>
-          <a:ln>
-            <a:noFill/>
-          </a:ln>
-          <a:effectLst/>
-        </p:spPr>
-        <p:style>
-          <a:lnRef idx="1">
-            <a:schemeClr val="accent1"/>
-          </a:lnRef>
-          <a:fillRef idx="3">
-            <a:schemeClr val="accent1"/>
-          </a:fillRef>
-          <a:effectRef idx="2">
-            <a:schemeClr val="accent1"/>
-          </a:effectRef>
-          <a:fontRef idx="minor">
-            <a:schemeClr val="lt1"/>
-          </a:fontRef>
-        </p:style>
-        <p:txBody>
-          <a:bodyPr rtlCol="0" anchor="ctr"/>
-          <a:lstStyle/>
-          <a:p>
             <a:pPr algn="ctr"/>
-          </a:p>
-        </p:txBody>
-      </p:sp>
-      <p:sp>
-        <p:nvSpPr>
-          <p:cNvPr id="6" name="TextBox 5"/>
-          <p:cNvSpPr txBox="1"/>
-          <p:nvPr/>
-        </p:nvSpPr>
-        <p:spPr>
-          <a:xfrm>
-            <a:off x="566928" y="3237039"/>
-            <a:ext cx="11057839" cy="254000"/>
-          </a:xfrm>
-          <a:prstGeom prst="rect">
-            <a:avLst/>
-          </a:prstGeom>
-          <a:noFill/>
-        </p:spPr>
-        <p:txBody>
-          <a:bodyPr wrap="none" lIns="0" rIns="0" tIns="0" bIns="0">
-            <a:noAutofit/>
-          </a:bodyPr>
-          <a:lstStyle/>
-          <a:p>
-            <a:r>
-              <a:rPr sz="1600" b="1">
-                <a:solidFill>
-                  <a:srgbClr val="5C7268"/>
-                </a:solidFill>
-                <a:latin typeface="Avenir Next"/>
-                <a:ea typeface="Hiragino Sans"/>
-                <a:cs typeface="Hiragino Sans"/>
-              </a:rPr>
-              <a:t>② 母線の収支｜注入電流 I_i = Σ_j I_ij（電流則）</a:t>
-            </a:r>
-          </a:p>
-        </p:txBody>
-      </p:sp>
-      <p:sp>
-        <p:nvSpPr>
-          <p:cNvPr id="7" name="TextBox 6"/>
-          <p:cNvSpPr txBox="1"/>
-          <p:nvPr/>
-        </p:nvSpPr>
-        <p:spPr>
-          <a:xfrm>
-            <a:off x="822960" y="3529139"/>
-            <a:ext cx="10801807" cy="695325"/>
-          </a:xfrm>
-          <a:prstGeom prst="rect">
-            <a:avLst/>
-          </a:prstGeom>
-          <a:noFill/>
-        </p:spPr>
-        <p:txBody>
-          <a:bodyPr wrap="square" lIns="0" rIns="0" tIns="0" bIns="0">
-            <a:noAutofit/>
-          </a:bodyPr>
-          <a:lstStyle/>
-          <a:p>
-            <a:pPr>
-              <a:lnSpc>
-                <a:spcPct val="130000"/>
-              </a:lnSpc>
-            </a:pPr>
-            <a:r>
-              <a:rPr sz="1500">
-                <a:solidFill>
-                  <a:srgbClr val="33221E"/>
-                </a:solidFill>
-                <a:latin typeface="Avenir Next"/>
-                <a:ea typeface="Hiragino Sans"/>
-                <a:cs typeface="Hiragino Sans"/>
-              </a:rPr>
-              <a:t>外から注入した電流は、つながる線路に全部分かれる。I_i = (Σ_j y_ij) V_i − Σ_j y_ij V_j。</a:t>
-            </a:r>
-            <a:r>
-              <a:rPr sz="1500" b="1">
-                <a:solidFill>
-                  <a:srgbClr val="33221E"/>
-                </a:solidFill>
-                <a:latin typeface="Avenir Next"/>
-                <a:ea typeface="Hiragino Sans"/>
-                <a:cs typeface="Hiragino Sans"/>
-              </a:rPr>
-              <a:t>V_i の係数が対角、V_j の係数が非対角</a:t>
-            </a:r>
-            <a:r>
-              <a:rPr sz="1500">
-                <a:solidFill>
-                  <a:srgbClr val="33221E"/>
-                </a:solidFill>
-                <a:latin typeface="Avenir Next"/>
-                <a:ea typeface="Hiragino Sans"/>
-                <a:cs typeface="Hiragino Sans"/>
-              </a:rPr>
-              <a:t>。</a:t>
-            </a:r>
-          </a:p>
-        </p:txBody>
-      </p:sp>
-      <p:sp>
-        <p:nvSpPr>
-          <p:cNvPr id="8" name="Rectangle 7"/>
-          <p:cNvSpPr/>
-          <p:nvPr/>
-        </p:nvSpPr>
-        <p:spPr>
-          <a:xfrm>
-            <a:off x="566928" y="4376356"/>
-            <a:ext cx="11057839" cy="9525"/>
-          </a:xfrm>
-          <a:prstGeom prst="rect">
-            <a:avLst/>
-          </a:prstGeom>
-          <a:solidFill>
-            <a:srgbClr val="E5DCCE"/>
-          </a:solidFill>
-          <a:ln>
-            <a:noFill/>
-          </a:ln>
-          <a:effectLst/>
-        </p:spPr>
-        <p:style>
-          <a:lnRef idx="1">
-            <a:schemeClr val="accent1"/>
-          </a:lnRef>
-          <a:fillRef idx="3">
-            <a:schemeClr val="accent1"/>
-          </a:fillRef>
-          <a:effectRef idx="2">
-            <a:schemeClr val="accent1"/>
-          </a:effectRef>
-          <a:fontRef idx="minor">
-            <a:schemeClr val="lt1"/>
-          </a:fontRef>
-        </p:style>
-        <p:txBody>
-          <a:bodyPr rtlCol="0" anchor="ctr"/>
-          <a:lstStyle/>
-          <a:p>
-            <a:pPr algn="ctr"/>
-          </a:p>
-        </p:txBody>
-      </p:sp>
-      <p:sp>
-        <p:nvSpPr>
-          <p:cNvPr id="9" name="build:ghost"/>
-          <p:cNvSpPr txBox="1"/>
-          <p:nvPr/>
-        </p:nvSpPr>
-        <p:spPr>
-          <a:xfrm>
-            <a:off x="566928" y="4553648"/>
-            <a:ext cx="11057839" cy="254000"/>
-          </a:xfrm>
-          <a:prstGeom prst="rect">
-            <a:avLst/>
-          </a:prstGeom>
-          <a:noFill/>
-        </p:spPr>
-        <p:txBody>
-          <a:bodyPr wrap="none" lIns="0" rIns="0" tIns="0" bIns="0">
-            <a:noAutofit/>
-          </a:bodyPr>
-          <a:lstStyle/>
-          <a:p>
-            <a:r>
-              <a:rPr sz="1600" b="1">
-                <a:solidFill>
-                  <a:srgbClr val="C1C9C5"/>
-                </a:solidFill>
-                <a:latin typeface="Avenir Next"/>
-                <a:ea typeface="Hiragino Sans"/>
-                <a:cs typeface="Hiragino Sans"/>
-              </a:rPr>
-              <a:t>③ 並べる｜Y_ii = Σ_j y_ij + 対地分、Y_ij = −y_ij → I = Y_bus V</a:t>
-            </a:r>
-          </a:p>
-        </p:txBody>
-      </p:sp>
-      <p:sp>
-        <p:nvSpPr>
-          <p:cNvPr id="10" name="build:ghost"/>
-          <p:cNvSpPr txBox="1"/>
-          <p:nvPr/>
-        </p:nvSpPr>
-        <p:spPr>
-          <a:xfrm>
-            <a:off x="822960" y="4845748"/>
-            <a:ext cx="10801807" cy="385762"/>
-          </a:xfrm>
-          <a:prstGeom prst="rect">
-            <a:avLst/>
-          </a:prstGeom>
-          <a:noFill/>
-        </p:spPr>
-        <p:txBody>
-          <a:bodyPr wrap="square" lIns="0" rIns="0" tIns="0" bIns="0">
-            <a:noAutofit/>
-          </a:bodyPr>
-          <a:lstStyle/>
-          <a:p>
-            <a:pPr>
-              <a:lnSpc>
-                <a:spcPct val="130000"/>
-              </a:lnSpc>
-            </a:pPr>
-            <a:r>
-              <a:rPr sz="1500">
-                <a:solidFill>
-                  <a:srgbClr val="C1BCBB"/>
-                </a:solidFill>
-                <a:latin typeface="Avenir Next"/>
-                <a:ea typeface="Hiragino Sans"/>
-                <a:cs typeface="Hiragino Sans"/>
-              </a:rPr>
-              <a:t>全母線分を縦に並べると行列の式になる。対称（Y_ij = Y_ji）で、線路のない i–j は 0。</a:t>
-            </a:r>
-            <a:r>
-              <a:rPr sz="1500" b="1">
-                <a:solidFill>
-                  <a:srgbClr val="C1BCBB"/>
-                </a:solidFill>
-                <a:latin typeface="Avenir Next"/>
-                <a:ea typeface="Hiragino Sans"/>
-                <a:cs typeface="Hiragino Sans"/>
-              </a:rPr>
-              <a:t>疎</a:t>
-            </a:r>
-            <a:r>
-              <a:rPr sz="1500">
-                <a:solidFill>
-                  <a:srgbClr val="C1BCBB"/>
-                </a:solidFill>
-                <a:latin typeface="Avenir Next"/>
-                <a:ea typeface="Hiragino Sans"/>
-                <a:cs typeface="Hiragino Sans"/>
-              </a:rPr>
-              <a:t> で </a:t>
-            </a:r>
-            <a:r>
-              <a:rPr sz="1500" b="1">
-                <a:solidFill>
-                  <a:srgbClr val="C1BCBB"/>
-                </a:solidFill>
-                <a:latin typeface="Avenir Next"/>
-                <a:ea typeface="Hiragino Sans"/>
-                <a:cs typeface="Hiragino Sans"/>
-              </a:rPr>
-              <a:t>対称</a:t>
-            </a:r>
-            <a:r>
-              <a:rPr sz="1500">
-                <a:solidFill>
-                  <a:srgbClr val="C1BCBB"/>
-                </a:solidFill>
-                <a:latin typeface="Avenir Next"/>
-                <a:ea typeface="Hiragino Sans"/>
-                <a:cs typeface="Hiragino Sans"/>
-              </a:rPr>
-              <a:t> はここから来る。</a:t>
-            </a:r>
-          </a:p>
-        </p:txBody>
-      </p:sp>
-      <p:sp>
-        <p:nvSpPr>
-          <p:cNvPr id="11" name="TextBox 10"/>
+            <a:r>
+              <a:rPr sz="1400">
+                <a:solidFill>
+                  <a:srgbClr val="71635B"/>
+                </a:solidFill>
+                <a:latin typeface="Avenir Next"/>
+                <a:ea typeface="Hiragino Sans"/>
+                <a:cs typeface="Hiragino Sans"/>
+              </a:rPr>
+              <a:t>外から注入した電流は、つながる線路に全部分かれる。I_i = (Σ_j y_ij) V_i − Σ_j y_ij V_j。V_i の係数が対角、V_j の係数が非対角。　出典｜コード/fig_ch04.py</a:t>
+            </a:r>
+          </a:p>
+        </p:txBody>
+      </p:sp>
+      <p:sp>
+        <p:nvSpPr>
+          <p:cNvPr id="5" name="TextBox 4"/>
           <p:cNvSpPr txBox="1"/>
           <p:nvPr/>
         </p:nvSpPr>
@@ -8052,59 +7725,14 @@
       <p:grpSpPr/>
       <p:sp>
         <p:nvSpPr>
-          <p:cNvPr id="2" name="TextBox 1"/>
+          <p:cNvPr id="2" name="edge:title"/>
           <p:cNvSpPr txBox="1"/>
           <p:nvPr/>
         </p:nvSpPr>
         <p:spPr>
           <a:xfrm>
-            <a:off x="566928" y="457200"/>
-            <a:ext cx="11057839" cy="658368"/>
-          </a:xfrm>
-          <a:prstGeom prst="rect">
-            <a:avLst/>
-          </a:prstGeom>
-          <a:noFill/>
-        </p:spPr>
-        <p:txBody>
-          <a:bodyPr wrap="square" lIns="0" rIns="0" tIns="0" bIns="0" anchor="ctr">
-            <a:noAutofit/>
-          </a:bodyPr>
-          <a:lstStyle/>
-          <a:p>
-            <a:pPr>
-              <a:lnSpc>
-                <a:spcPct val="106000"/>
-              </a:lnSpc>
-              <a:defRPr sz="3390" b="1">
-                <a:solidFill>
-                  <a:srgbClr val="7C332A"/>
-                </a:solidFill>
-                <a:latin typeface="Avenir Next"/>
-                <a:ea typeface="Hiragino Sans"/>
-                <a:cs typeface="Hiragino Sans"/>
-              </a:defRPr>
-            </a:pPr>
-            <a:r>
-              <a:rPr>
-                <a:ea typeface="Hiragino Sans"/>
-                <a:cs typeface="Hiragino Sans"/>
-              </a:rPr>
-              <a:t>導出 — キルヒホッフの電流則から I = Y_bus V</a:t>
-            </a:r>
-          </a:p>
-        </p:txBody>
-      </p:sp>
-      <p:sp>
-        <p:nvSpPr>
-          <p:cNvPr id="3" name="TextBox 2"/>
-          <p:cNvSpPr txBox="1"/>
-          <p:nvPr/>
-        </p:nvSpPr>
-        <p:spPr>
-          <a:xfrm>
-            <a:off x="566928" y="2229993"/>
-            <a:ext cx="11057839" cy="254000"/>
+            <a:off x="566928" y="146304"/>
+            <a:ext cx="11057839" cy="457200"/>
           </a:xfrm>
           <a:prstGeom prst="rect">
             <a:avLst/>
@@ -8117,30 +7745,60 @@
           </a:bodyPr>
           <a:lstStyle/>
           <a:p>
-            <a:r>
-              <a:rPr sz="1600" b="1">
-                <a:solidFill>
-                  <a:srgbClr val="5C7268"/>
-                </a:solidFill>
-                <a:latin typeface="Avenir Next"/>
-                <a:ea typeface="Hiragino Sans"/>
-                <a:cs typeface="Hiragino Sans"/>
-              </a:rPr>
-              <a:t>① 線路の電流｜母線 i から j へ I_ij = y_ij (V_i − V_j)</a:t>
-            </a:r>
-          </a:p>
-        </p:txBody>
-      </p:sp>
-      <p:sp>
-        <p:nvSpPr>
-          <p:cNvPr id="4" name="TextBox 3"/>
+            <a:pPr>
+              <a:defRPr sz="2400" b="1">
+                <a:solidFill>
+                  <a:srgbClr val="7C332A"/>
+                </a:solidFill>
+                <a:latin typeface="Avenir Next"/>
+                <a:ea typeface="Hiragino Sans"/>
+                <a:cs typeface="Hiragino Sans"/>
+              </a:defRPr>
+            </a:pPr>
+            <a:r>
+              <a:rPr>
+                <a:ea typeface="Hiragino Sans"/>
+                <a:cs typeface="Hiragino Sans"/>
+              </a:rPr>
+              <a:t>導出 — キルヒホッフの電流則から I = Y_bus V</a:t>
+            </a:r>
+          </a:p>
+        </p:txBody>
+      </p:sp>
+      <p:pic>
+        <p:nvPicPr>
+          <p:cNvPr id="3" name="Picture 2" descr="ch04_deriv_ybus_3.png"/>
+          <p:cNvPicPr>
+            <a:picLocks noChangeAspect="1"/>
+          </p:cNvPicPr>
+          <p:nvPr/>
+        </p:nvPicPr>
+        <p:blipFill>
+          <a:blip r:embed="rId2"/>
+          <a:stretch>
+            <a:fillRect/>
+          </a:stretch>
+        </p:blipFill>
+        <p:spPr>
+          <a:xfrm>
+            <a:off x="551856" y="713232"/>
+            <a:ext cx="11087983" cy="5532120"/>
+          </a:xfrm>
+          <a:prstGeom prst="rect">
+            <a:avLst/>
+          </a:prstGeom>
+        </p:spPr>
+      </p:pic>
+      <p:sp>
+        <p:nvSpPr>
+          <p:cNvPr id="4" name="edge:caption"/>
           <p:cNvSpPr txBox="1"/>
           <p:nvPr/>
         </p:nvSpPr>
         <p:spPr>
           <a:xfrm>
-            <a:off x="822960" y="2522093"/>
-            <a:ext cx="10801807" cy="385762"/>
+            <a:off x="228600" y="6300216"/>
+            <a:ext cx="11734495" cy="310896"/>
           </a:xfrm>
           <a:prstGeom prst="rect">
             <a:avLst/>
@@ -8153,336 +7811,24 @@
           </a:bodyPr>
           <a:lstStyle/>
           <a:p>
-            <a:pPr>
-              <a:lnSpc>
-                <a:spcPct val="130000"/>
-              </a:lnSpc>
-            </a:pPr>
-            <a:r>
-              <a:rPr sz="1500">
-                <a:solidFill>
-                  <a:srgbClr val="33221E"/>
-                </a:solidFill>
-                <a:latin typeface="Avenir Next"/>
-                <a:ea typeface="Hiragino Sans"/>
-                <a:cs typeface="Hiragino Sans"/>
-              </a:rPr>
-              <a:t>線路は直列アドミタンス y_ij = 1/z_ij。両端の電圧差に比例した電流が流れる（オームの法則）。</a:t>
-            </a:r>
-          </a:p>
-        </p:txBody>
-      </p:sp>
-      <p:sp>
-        <p:nvSpPr>
-          <p:cNvPr id="5" name="Rectangle 4"/>
-          <p:cNvSpPr/>
-          <p:nvPr/>
-        </p:nvSpPr>
-        <p:spPr>
-          <a:xfrm>
-            <a:off x="566928" y="3059747"/>
-            <a:ext cx="11057839" cy="9525"/>
-          </a:xfrm>
-          <a:prstGeom prst="rect">
-            <a:avLst/>
-          </a:prstGeom>
-          <a:solidFill>
-            <a:srgbClr val="E5DCCE"/>
-          </a:solidFill>
-          <a:ln>
-            <a:noFill/>
-          </a:ln>
-          <a:effectLst/>
-        </p:spPr>
-        <p:style>
-          <a:lnRef idx="1">
-            <a:schemeClr val="accent1"/>
-          </a:lnRef>
-          <a:fillRef idx="3">
-            <a:schemeClr val="accent1"/>
-          </a:fillRef>
-          <a:effectRef idx="2">
-            <a:schemeClr val="accent1"/>
-          </a:effectRef>
-          <a:fontRef idx="minor">
-            <a:schemeClr val="lt1"/>
-          </a:fontRef>
-        </p:style>
-        <p:txBody>
-          <a:bodyPr rtlCol="0" anchor="ctr"/>
-          <a:lstStyle/>
-          <a:p>
             <a:pPr algn="ctr"/>
-          </a:p>
-        </p:txBody>
-      </p:sp>
-      <p:sp>
-        <p:nvSpPr>
-          <p:cNvPr id="6" name="TextBox 5"/>
-          <p:cNvSpPr txBox="1"/>
-          <p:nvPr/>
-        </p:nvSpPr>
-        <p:spPr>
-          <a:xfrm>
-            <a:off x="566928" y="3237039"/>
-            <a:ext cx="11057839" cy="254000"/>
-          </a:xfrm>
-          <a:prstGeom prst="rect">
-            <a:avLst/>
-          </a:prstGeom>
-          <a:noFill/>
-        </p:spPr>
-        <p:txBody>
-          <a:bodyPr wrap="none" lIns="0" rIns="0" tIns="0" bIns="0">
-            <a:noAutofit/>
-          </a:bodyPr>
-          <a:lstStyle/>
-          <a:p>
-            <a:r>
-              <a:rPr sz="1600" b="1">
-                <a:solidFill>
-                  <a:srgbClr val="5C7268"/>
-                </a:solidFill>
-                <a:latin typeface="Avenir Next"/>
-                <a:ea typeface="Hiragino Sans"/>
-                <a:cs typeface="Hiragino Sans"/>
-              </a:rPr>
-              <a:t>② 母線の収支｜注入電流 I_i = Σ_j I_ij（電流則）</a:t>
-            </a:r>
-          </a:p>
-        </p:txBody>
-      </p:sp>
-      <p:sp>
-        <p:nvSpPr>
-          <p:cNvPr id="7" name="TextBox 6"/>
-          <p:cNvSpPr txBox="1"/>
-          <p:nvPr/>
-        </p:nvSpPr>
-        <p:spPr>
-          <a:xfrm>
-            <a:off x="822960" y="3529139"/>
-            <a:ext cx="10801807" cy="695325"/>
-          </a:xfrm>
-          <a:prstGeom prst="rect">
-            <a:avLst/>
-          </a:prstGeom>
-          <a:noFill/>
-        </p:spPr>
-        <p:txBody>
-          <a:bodyPr wrap="square" lIns="0" rIns="0" tIns="0" bIns="0">
-            <a:noAutofit/>
-          </a:bodyPr>
-          <a:lstStyle/>
-          <a:p>
-            <a:pPr>
-              <a:lnSpc>
-                <a:spcPct val="130000"/>
-              </a:lnSpc>
-            </a:pPr>
-            <a:r>
-              <a:rPr sz="1500">
-                <a:solidFill>
-                  <a:srgbClr val="33221E"/>
-                </a:solidFill>
-                <a:latin typeface="Avenir Next"/>
-                <a:ea typeface="Hiragino Sans"/>
-                <a:cs typeface="Hiragino Sans"/>
-              </a:rPr>
-              <a:t>外から注入した電流は、つながる線路に全部分かれる。I_i = (Σ_j y_ij) V_i − Σ_j y_ij V_j。</a:t>
-            </a:r>
-            <a:r>
-              <a:rPr sz="1500" b="1">
-                <a:solidFill>
-                  <a:srgbClr val="33221E"/>
-                </a:solidFill>
-                <a:latin typeface="Avenir Next"/>
-                <a:ea typeface="Hiragino Sans"/>
-                <a:cs typeface="Hiragino Sans"/>
-              </a:rPr>
-              <a:t>V_i の係数が対角、V_j の係数が非対角</a:t>
-            </a:r>
-            <a:r>
-              <a:rPr sz="1500">
-                <a:solidFill>
-                  <a:srgbClr val="33221E"/>
-                </a:solidFill>
-                <a:latin typeface="Avenir Next"/>
-                <a:ea typeface="Hiragino Sans"/>
-                <a:cs typeface="Hiragino Sans"/>
-              </a:rPr>
-              <a:t>。</a:t>
-            </a:r>
-          </a:p>
-        </p:txBody>
-      </p:sp>
-      <p:sp>
-        <p:nvSpPr>
-          <p:cNvPr id="8" name="Rectangle 7"/>
-          <p:cNvSpPr/>
-          <p:nvPr/>
-        </p:nvSpPr>
-        <p:spPr>
-          <a:xfrm>
-            <a:off x="566928" y="4376356"/>
-            <a:ext cx="11057839" cy="9525"/>
-          </a:xfrm>
-          <a:prstGeom prst="rect">
-            <a:avLst/>
-          </a:prstGeom>
-          <a:solidFill>
-            <a:srgbClr val="E5DCCE"/>
-          </a:solidFill>
-          <a:ln>
-            <a:noFill/>
-          </a:ln>
-          <a:effectLst/>
-        </p:spPr>
-        <p:style>
-          <a:lnRef idx="1">
-            <a:schemeClr val="accent1"/>
-          </a:lnRef>
-          <a:fillRef idx="3">
-            <a:schemeClr val="accent1"/>
-          </a:fillRef>
-          <a:effectRef idx="2">
-            <a:schemeClr val="accent1"/>
-          </a:effectRef>
-          <a:fontRef idx="minor">
-            <a:schemeClr val="lt1"/>
-          </a:fontRef>
-        </p:style>
-        <p:txBody>
-          <a:bodyPr rtlCol="0" anchor="ctr"/>
-          <a:lstStyle/>
-          <a:p>
-            <a:pPr algn="ctr"/>
-          </a:p>
-        </p:txBody>
-      </p:sp>
-      <p:sp>
-        <p:nvSpPr>
-          <p:cNvPr id="9" name="TextBox 8"/>
-          <p:cNvSpPr txBox="1"/>
-          <p:nvPr/>
-        </p:nvSpPr>
-        <p:spPr>
-          <a:xfrm>
-            <a:off x="566928" y="4553648"/>
-            <a:ext cx="11057839" cy="254000"/>
-          </a:xfrm>
-          <a:prstGeom prst="rect">
-            <a:avLst/>
-          </a:prstGeom>
-          <a:noFill/>
-        </p:spPr>
-        <p:txBody>
-          <a:bodyPr wrap="none" lIns="0" rIns="0" tIns="0" bIns="0">
-            <a:noAutofit/>
-          </a:bodyPr>
-          <a:lstStyle/>
-          <a:p>
-            <a:r>
-              <a:rPr sz="1600" b="1">
-                <a:solidFill>
-                  <a:srgbClr val="5C7268"/>
-                </a:solidFill>
-                <a:latin typeface="Avenir Next"/>
-                <a:ea typeface="Hiragino Sans"/>
-                <a:cs typeface="Hiragino Sans"/>
-              </a:rPr>
-              <a:t>③ 並べる｜Y_ii = Σ_j y_ij + 対地分、Y_ij = −y_ij → I = Y_bus V</a:t>
-            </a:r>
-          </a:p>
-        </p:txBody>
-      </p:sp>
-      <p:sp>
-        <p:nvSpPr>
-          <p:cNvPr id="10" name="TextBox 9"/>
-          <p:cNvSpPr txBox="1"/>
-          <p:nvPr/>
-        </p:nvSpPr>
-        <p:spPr>
-          <a:xfrm>
-            <a:off x="822960" y="4845748"/>
-            <a:ext cx="10801807" cy="385762"/>
-          </a:xfrm>
-          <a:prstGeom prst="rect">
-            <a:avLst/>
-          </a:prstGeom>
-          <a:noFill/>
-        </p:spPr>
-        <p:txBody>
-          <a:bodyPr wrap="square" lIns="0" rIns="0" tIns="0" bIns="0">
-            <a:noAutofit/>
-          </a:bodyPr>
-          <a:lstStyle/>
-          <a:p>
-            <a:pPr>
-              <a:lnSpc>
-                <a:spcPct val="130000"/>
-              </a:lnSpc>
-            </a:pPr>
-            <a:r>
-              <a:rPr sz="1500">
-                <a:solidFill>
-                  <a:srgbClr val="33221E"/>
-                </a:solidFill>
-                <a:latin typeface="Avenir Next"/>
-                <a:ea typeface="Hiragino Sans"/>
-                <a:cs typeface="Hiragino Sans"/>
-              </a:rPr>
-              <a:t>全母線分を縦に並べると行列の式になる。対称（Y_ij = Y_ji）で、線路のない i–j は 0。</a:t>
-            </a:r>
-            <a:r>
-              <a:rPr sz="1500" b="1">
-                <a:solidFill>
-                  <a:srgbClr val="33221E"/>
-                </a:solidFill>
-                <a:latin typeface="Avenir Next"/>
-                <a:ea typeface="Hiragino Sans"/>
-                <a:cs typeface="Hiragino Sans"/>
-              </a:rPr>
-              <a:t>疎</a:t>
-            </a:r>
-            <a:r>
-              <a:rPr sz="1500">
-                <a:solidFill>
-                  <a:srgbClr val="33221E"/>
-                </a:solidFill>
-                <a:latin typeface="Avenir Next"/>
-                <a:ea typeface="Hiragino Sans"/>
-                <a:cs typeface="Hiragino Sans"/>
-              </a:rPr>
-              <a:t> で </a:t>
-            </a:r>
-            <a:r>
-              <a:rPr sz="1500" b="1">
-                <a:solidFill>
-                  <a:srgbClr val="33221E"/>
-                </a:solidFill>
-                <a:latin typeface="Avenir Next"/>
-                <a:ea typeface="Hiragino Sans"/>
-                <a:cs typeface="Hiragino Sans"/>
-              </a:rPr>
-              <a:t>対称</a:t>
-            </a:r>
-            <a:r>
-              <a:rPr sz="1500">
-                <a:solidFill>
-                  <a:srgbClr val="33221E"/>
-                </a:solidFill>
-                <a:latin typeface="Avenir Next"/>
-                <a:ea typeface="Hiragino Sans"/>
-                <a:cs typeface="Hiragino Sans"/>
-              </a:rPr>
-              <a:t> はここから来る。</a:t>
-            </a:r>
-          </a:p>
-        </p:txBody>
-      </p:sp>
-      <p:sp>
-        <p:nvSpPr>
-          <p:cNvPr id="11" name="TextBox 10"/>
+            <a:r>
+              <a:rPr sz="1400">
+                <a:solidFill>
+                  <a:srgbClr val="71635B"/>
+                </a:solidFill>
+                <a:latin typeface="Avenir Next"/>
+                <a:ea typeface="Hiragino Sans"/>
+                <a:cs typeface="Hiragino Sans"/>
+              </a:rPr>
+              <a:t>全母線分を縦に並べると行列の式になる。対称（Y_ij = Y_ji）で、線路のない i–j は 0。疎 で 対称 はここから来る。　出典｜コード/fig_ch04.py</a:t>
+            </a:r>
+          </a:p>
+        </p:txBody>
+      </p:sp>
+      <p:sp>
+        <p:nvSpPr>
+          <p:cNvPr id="5" name="TextBox 4"/>
           <p:cNvSpPr txBox="1"/>
           <p:nvPr/>
         </p:nvSpPr>
@@ -10789,59 +10135,14 @@
       <p:grpSpPr/>
       <p:sp>
         <p:nvSpPr>
-          <p:cNvPr id="2" name="TextBox 1"/>
+          <p:cNvPr id="2" name="edge:title"/>
           <p:cNvSpPr txBox="1"/>
           <p:nvPr/>
         </p:nvSpPr>
         <p:spPr>
           <a:xfrm>
-            <a:off x="566928" y="457200"/>
-            <a:ext cx="11057839" cy="658368"/>
-          </a:xfrm>
-          <a:prstGeom prst="rect">
-            <a:avLst/>
-          </a:prstGeom>
-          <a:noFill/>
-        </p:spPr>
-        <p:txBody>
-          <a:bodyPr wrap="square" lIns="0" rIns="0" tIns="0" bIns="0" anchor="ctr">
-            <a:noAutofit/>
-          </a:bodyPr>
-          <a:lstStyle/>
-          <a:p>
-            <a:pPr>
-              <a:lnSpc>
-                <a:spcPct val="106000"/>
-              </a:lnSpc>
-              <a:defRPr sz="3390" b="1">
-                <a:solidFill>
-                  <a:srgbClr val="7C332A"/>
-                </a:solidFill>
-                <a:latin typeface="Avenir Next"/>
-                <a:ea typeface="Hiragino Sans"/>
-                <a:cs typeface="Hiragino Sans"/>
-              </a:defRPr>
-            </a:pPr>
-            <a:r>
-              <a:rPr>
-                <a:ea typeface="Hiragino Sans"/>
-                <a:cs typeface="Hiragino Sans"/>
-              </a:rPr>
-              <a:t>導出 — S_i = V_i I_i* から P_i と Q_i へ</a:t>
-            </a:r>
-          </a:p>
-        </p:txBody>
-      </p:sp>
-      <p:sp>
-        <p:nvSpPr>
-          <p:cNvPr id="3" name="TextBox 2"/>
-          <p:cNvSpPr txBox="1"/>
-          <p:nvPr/>
-        </p:nvSpPr>
-        <p:spPr>
-          <a:xfrm>
-            <a:off x="566928" y="2075212"/>
-            <a:ext cx="11057839" cy="254000"/>
+            <a:off x="566928" y="146304"/>
+            <a:ext cx="11057839" cy="457200"/>
           </a:xfrm>
           <a:prstGeom prst="rect">
             <a:avLst/>
@@ -10854,30 +10155,60 @@
           </a:bodyPr>
           <a:lstStyle/>
           <a:p>
-            <a:r>
-              <a:rPr sz="1600" b="1">
-                <a:solidFill>
-                  <a:srgbClr val="5C7268"/>
-                </a:solidFill>
-                <a:latin typeface="Avenir Next"/>
-                <a:ea typeface="Hiragino Sans"/>
-                <a:cs typeface="Hiragino Sans"/>
-              </a:rPr>
-              <a:t>① 複素電力｜S_i = P_i + jQ_i = V_i I_i*（第3回）</a:t>
-            </a:r>
-          </a:p>
-        </p:txBody>
-      </p:sp>
-      <p:sp>
-        <p:nvSpPr>
-          <p:cNvPr id="4" name="TextBox 3"/>
+            <a:pPr>
+              <a:defRPr sz="2400" b="1">
+                <a:solidFill>
+                  <a:srgbClr val="7C332A"/>
+                </a:solidFill>
+                <a:latin typeface="Avenir Next"/>
+                <a:ea typeface="Hiragino Sans"/>
+                <a:cs typeface="Hiragino Sans"/>
+              </a:defRPr>
+            </a:pPr>
+            <a:r>
+              <a:rPr>
+                <a:ea typeface="Hiragino Sans"/>
+                <a:cs typeface="Hiragino Sans"/>
+              </a:rPr>
+              <a:t>導出 — S_i = V_i I_i* から P_i と Q_i へ</a:t>
+            </a:r>
+          </a:p>
+        </p:txBody>
+      </p:sp>
+      <p:pic>
+        <p:nvPicPr>
+          <p:cNvPr id="3" name="Picture 2" descr="ch04_deriv_pq_1.png"/>
+          <p:cNvPicPr>
+            <a:picLocks noChangeAspect="1"/>
+          </p:cNvPicPr>
+          <p:nvPr/>
+        </p:nvPicPr>
+        <p:blipFill>
+          <a:blip r:embed="rId2"/>
+          <a:stretch>
+            <a:fillRect/>
+          </a:stretch>
+        </p:blipFill>
+        <p:spPr>
+          <a:xfrm>
+            <a:off x="551856" y="713232"/>
+            <a:ext cx="11087983" cy="5532120"/>
+          </a:xfrm>
+          <a:prstGeom prst="rect">
+            <a:avLst/>
+          </a:prstGeom>
+        </p:spPr>
+      </p:pic>
+      <p:sp>
+        <p:nvSpPr>
+          <p:cNvPr id="4" name="edge:caption"/>
           <p:cNvSpPr txBox="1"/>
           <p:nvPr/>
         </p:nvSpPr>
         <p:spPr>
           <a:xfrm>
-            <a:off x="822960" y="2367312"/>
-            <a:ext cx="10801807" cy="385762"/>
+            <a:off x="228600" y="6300216"/>
+            <a:ext cx="11734495" cy="310896"/>
           </a:xfrm>
           <a:prstGeom prst="rect">
             <a:avLst/>
@@ -10890,314 +10221,24 @@
           </a:bodyPr>
           <a:lstStyle/>
           <a:p>
-            <a:pPr>
-              <a:lnSpc>
-                <a:spcPct val="130000"/>
-              </a:lnSpc>
-            </a:pPr>
-            <a:r>
-              <a:rPr sz="1500">
-                <a:solidFill>
-                  <a:srgbClr val="33221E"/>
-                </a:solidFill>
-                <a:latin typeface="Avenir Next"/>
-                <a:ea typeface="Hiragino Sans"/>
-                <a:cs typeface="Hiragino Sans"/>
-              </a:rPr>
-              <a:t>母線 i に注入する電力。I_i は Ⅰ章の I_i = Σ_j Y_ij V_j で電圧に置き換わる。</a:t>
-            </a:r>
-          </a:p>
-        </p:txBody>
-      </p:sp>
-      <p:sp>
-        <p:nvSpPr>
-          <p:cNvPr id="5" name="Rectangle 4"/>
-          <p:cNvSpPr/>
-          <p:nvPr/>
-        </p:nvSpPr>
-        <p:spPr>
-          <a:xfrm>
-            <a:off x="566928" y="2904966"/>
-            <a:ext cx="11057839" cy="9525"/>
-          </a:xfrm>
-          <a:prstGeom prst="rect">
-            <a:avLst/>
-          </a:prstGeom>
-          <a:solidFill>
-            <a:srgbClr val="E5DCCE"/>
-          </a:solidFill>
-          <a:ln>
-            <a:noFill/>
-          </a:ln>
-          <a:effectLst/>
-        </p:spPr>
-        <p:style>
-          <a:lnRef idx="1">
-            <a:schemeClr val="accent1"/>
-          </a:lnRef>
-          <a:fillRef idx="3">
-            <a:schemeClr val="accent1"/>
-          </a:fillRef>
-          <a:effectRef idx="2">
-            <a:schemeClr val="accent1"/>
-          </a:effectRef>
-          <a:fontRef idx="minor">
-            <a:schemeClr val="lt1"/>
-          </a:fontRef>
-        </p:style>
-        <p:txBody>
-          <a:bodyPr rtlCol="0" anchor="ctr"/>
-          <a:lstStyle/>
-          <a:p>
             <a:pPr algn="ctr"/>
-          </a:p>
-        </p:txBody>
-      </p:sp>
-      <p:sp>
-        <p:nvSpPr>
-          <p:cNvPr id="6" name="build:ghost"/>
-          <p:cNvSpPr txBox="1"/>
-          <p:nvPr/>
-        </p:nvSpPr>
-        <p:spPr>
-          <a:xfrm>
-            <a:off x="566928" y="3082258"/>
-            <a:ext cx="11057839" cy="254000"/>
-          </a:xfrm>
-          <a:prstGeom prst="rect">
-            <a:avLst/>
-          </a:prstGeom>
-          <a:noFill/>
-        </p:spPr>
-        <p:txBody>
-          <a:bodyPr wrap="none" lIns="0" rIns="0" tIns="0" bIns="0">
-            <a:noAutofit/>
-          </a:bodyPr>
-          <a:lstStyle/>
-          <a:p>
-            <a:r>
-              <a:rPr sz="1600" b="1">
-                <a:solidFill>
-                  <a:srgbClr val="C1C9C5"/>
-                </a:solidFill>
-                <a:latin typeface="Avenir Next"/>
-                <a:ea typeface="Hiragino Sans"/>
-                <a:cs typeface="Hiragino Sans"/>
-              </a:rPr>
-              <a:t>② 代入｜S_i = V_i Σ_j Y_ij* V_j*</a:t>
-            </a:r>
-          </a:p>
-        </p:txBody>
-      </p:sp>
-      <p:sp>
-        <p:nvSpPr>
-          <p:cNvPr id="7" name="build:ghost"/>
-          <p:cNvSpPr txBox="1"/>
-          <p:nvPr/>
-        </p:nvSpPr>
-        <p:spPr>
-          <a:xfrm>
-            <a:off x="822960" y="3374358"/>
-            <a:ext cx="10801807" cy="695325"/>
-          </a:xfrm>
-          <a:prstGeom prst="rect">
-            <a:avLst/>
-          </a:prstGeom>
-          <a:noFill/>
-        </p:spPr>
-        <p:txBody>
-          <a:bodyPr wrap="square" lIns="0" rIns="0" tIns="0" bIns="0">
-            <a:noAutofit/>
-          </a:bodyPr>
-          <a:lstStyle/>
-          <a:p>
-            <a:pPr>
-              <a:lnSpc>
-                <a:spcPct val="130000"/>
-              </a:lnSpc>
-            </a:pPr>
-            <a:r>
-              <a:rPr sz="1500">
-                <a:solidFill>
-                  <a:srgbClr val="C1BCBB"/>
-                </a:solidFill>
-                <a:latin typeface="Avenir Next"/>
-                <a:ea typeface="Hiragino Sans"/>
-                <a:cs typeface="Hiragino Sans"/>
-              </a:rPr>
-              <a:t>極形式 V_i = V_i e^{jθ_i}、Y_ij = G_ij + jB_ij を入れると S_i = Σ_j V_i V_j (G_ij − jB_ij) e^{j(θ_i − θ_j)}。</a:t>
-            </a:r>
-            <a:r>
-              <a:rPr sz="1500" b="1">
-                <a:solidFill>
-                  <a:srgbClr val="C1BCBB"/>
-                </a:solidFill>
-                <a:latin typeface="Avenir Next"/>
-                <a:ea typeface="Hiragino Sans"/>
-                <a:cs typeface="Hiragino Sans"/>
-              </a:rPr>
-              <a:t>電圧の積 V_i V_j</a:t>
-            </a:r>
-            <a:r>
-              <a:rPr sz="1500">
-                <a:solidFill>
-                  <a:srgbClr val="C1BCBB"/>
-                </a:solidFill>
-                <a:latin typeface="Avenir Next"/>
-                <a:ea typeface="Hiragino Sans"/>
-                <a:cs typeface="Hiragino Sans"/>
-              </a:rPr>
-              <a:t> がここで生まれる。</a:t>
-            </a:r>
-          </a:p>
-        </p:txBody>
-      </p:sp>
-      <p:sp>
-        <p:nvSpPr>
-          <p:cNvPr id="8" name="Rectangle 7"/>
-          <p:cNvSpPr/>
-          <p:nvPr/>
-        </p:nvSpPr>
-        <p:spPr>
-          <a:xfrm>
-            <a:off x="566928" y="4221575"/>
-            <a:ext cx="11057839" cy="9525"/>
-          </a:xfrm>
-          <a:prstGeom prst="rect">
-            <a:avLst/>
-          </a:prstGeom>
-          <a:solidFill>
-            <a:srgbClr val="E5DCCE"/>
-          </a:solidFill>
-          <a:ln>
-            <a:noFill/>
-          </a:ln>
-          <a:effectLst/>
-        </p:spPr>
-        <p:style>
-          <a:lnRef idx="1">
-            <a:schemeClr val="accent1"/>
-          </a:lnRef>
-          <a:fillRef idx="3">
-            <a:schemeClr val="accent1"/>
-          </a:fillRef>
-          <a:effectRef idx="2">
-            <a:schemeClr val="accent1"/>
-          </a:effectRef>
-          <a:fontRef idx="minor">
-            <a:schemeClr val="lt1"/>
-          </a:fontRef>
-        </p:style>
-        <p:txBody>
-          <a:bodyPr rtlCol="0" anchor="ctr"/>
-          <a:lstStyle/>
-          <a:p>
-            <a:pPr algn="ctr"/>
-          </a:p>
-        </p:txBody>
-      </p:sp>
-      <p:sp>
-        <p:nvSpPr>
-          <p:cNvPr id="9" name="build:ghost"/>
-          <p:cNvSpPr txBox="1"/>
-          <p:nvPr/>
-        </p:nvSpPr>
-        <p:spPr>
-          <a:xfrm>
-            <a:off x="566928" y="4398867"/>
-            <a:ext cx="11057839" cy="254000"/>
-          </a:xfrm>
-          <a:prstGeom prst="rect">
-            <a:avLst/>
-          </a:prstGeom>
-          <a:noFill/>
-        </p:spPr>
-        <p:txBody>
-          <a:bodyPr wrap="none" lIns="0" rIns="0" tIns="0" bIns="0">
-            <a:noAutofit/>
-          </a:bodyPr>
-          <a:lstStyle/>
-          <a:p>
-            <a:r>
-              <a:rPr sz="1600" b="1">
-                <a:solidFill>
-                  <a:srgbClr val="C1C9C5"/>
-                </a:solidFill>
-                <a:latin typeface="Avenir Next"/>
-                <a:ea typeface="Hiragino Sans"/>
-                <a:cs typeface="Hiragino Sans"/>
-              </a:rPr>
-              <a:t>③ オイラー｜e^{jθ_ij} = cos θ_ij + j sin θ_ij で実部と虚部に分ける</a:t>
-            </a:r>
-          </a:p>
-        </p:txBody>
-      </p:sp>
-      <p:sp>
-        <p:nvSpPr>
-          <p:cNvPr id="10" name="build:ghost"/>
-          <p:cNvSpPr txBox="1"/>
-          <p:nvPr/>
-        </p:nvSpPr>
-        <p:spPr>
-          <a:xfrm>
-            <a:off x="822960" y="4690967"/>
-            <a:ext cx="10801807" cy="695325"/>
-          </a:xfrm>
-          <a:prstGeom prst="rect">
-            <a:avLst/>
-          </a:prstGeom>
-          <a:noFill/>
-        </p:spPr>
-        <p:txBody>
-          <a:bodyPr wrap="square" lIns="0" rIns="0" tIns="0" bIns="0">
-            <a:noAutofit/>
-          </a:bodyPr>
-          <a:lstStyle/>
-          <a:p>
-            <a:pPr>
-              <a:lnSpc>
-                <a:spcPct val="130000"/>
-              </a:lnSpc>
-            </a:pPr>
-            <a:r>
-              <a:rPr sz="1500">
-                <a:solidFill>
-                  <a:srgbClr val="C1BCBB"/>
-                </a:solidFill>
-                <a:latin typeface="Avenir Next"/>
-                <a:ea typeface="Hiragino Sans"/>
-                <a:cs typeface="Hiragino Sans"/>
-              </a:rPr>
-              <a:t>P_i = V_i Σ_j V_j (G_ij cos θ_ij + B_ij sin θ_ij)、Q_i = V_i Σ_j V_j (G_ij sin θ_ij − B_ij cos θ_ij)。母線ごとに </a:t>
-            </a:r>
-            <a:r>
-              <a:rPr sz="1500" b="1">
-                <a:solidFill>
-                  <a:srgbClr val="C1BCBB"/>
-                </a:solidFill>
-                <a:latin typeface="Avenir Next"/>
-                <a:ea typeface="Hiragino Sans"/>
-                <a:cs typeface="Hiragino Sans"/>
-              </a:rPr>
-              <a:t>P の式と Q の式が 1 本ずつ</a:t>
-            </a:r>
-            <a:r>
-              <a:rPr sz="1500">
-                <a:solidFill>
-                  <a:srgbClr val="C1BCBB"/>
-                </a:solidFill>
-                <a:latin typeface="Avenir Next"/>
-                <a:ea typeface="Hiragino Sans"/>
-                <a:cs typeface="Hiragino Sans"/>
-              </a:rPr>
-              <a:t>。</a:t>
-            </a:r>
-          </a:p>
-        </p:txBody>
-      </p:sp>
-      <p:sp>
-        <p:nvSpPr>
-          <p:cNvPr id="11" name="TextBox 10"/>
+            <a:r>
+              <a:rPr sz="1400">
+                <a:solidFill>
+                  <a:srgbClr val="71635B"/>
+                </a:solidFill>
+                <a:latin typeface="Avenir Next"/>
+                <a:ea typeface="Hiragino Sans"/>
+                <a:cs typeface="Hiragino Sans"/>
+              </a:rPr>
+              <a:t>母線 i に注入する電力。I_i は Ⅰ章の I_i = Σ_j Y_ij V_j で電圧に置き換わる。　出典｜コード/fig_ch04.py</a:t>
+            </a:r>
+          </a:p>
+        </p:txBody>
+      </p:sp>
+      <p:sp>
+        <p:nvSpPr>
+          <p:cNvPr id="5" name="TextBox 4"/>
           <p:cNvSpPr txBox="1"/>
           <p:nvPr/>
         </p:nvSpPr>
@@ -11253,59 +10294,14 @@
       <p:grpSpPr/>
       <p:sp>
         <p:nvSpPr>
-          <p:cNvPr id="2" name="TextBox 1"/>
+          <p:cNvPr id="2" name="edge:title"/>
           <p:cNvSpPr txBox="1"/>
           <p:nvPr/>
         </p:nvSpPr>
         <p:spPr>
           <a:xfrm>
-            <a:off x="566928" y="457200"/>
-            <a:ext cx="11057839" cy="658368"/>
-          </a:xfrm>
-          <a:prstGeom prst="rect">
-            <a:avLst/>
-          </a:prstGeom>
-          <a:noFill/>
-        </p:spPr>
-        <p:txBody>
-          <a:bodyPr wrap="square" lIns="0" rIns="0" tIns="0" bIns="0" anchor="ctr">
-            <a:noAutofit/>
-          </a:bodyPr>
-          <a:lstStyle/>
-          <a:p>
-            <a:pPr>
-              <a:lnSpc>
-                <a:spcPct val="106000"/>
-              </a:lnSpc>
-              <a:defRPr sz="3390" b="1">
-                <a:solidFill>
-                  <a:srgbClr val="7C332A"/>
-                </a:solidFill>
-                <a:latin typeface="Avenir Next"/>
-                <a:ea typeface="Hiragino Sans"/>
-                <a:cs typeface="Hiragino Sans"/>
-              </a:defRPr>
-            </a:pPr>
-            <a:r>
-              <a:rPr>
-                <a:ea typeface="Hiragino Sans"/>
-                <a:cs typeface="Hiragino Sans"/>
-              </a:rPr>
-              <a:t>導出 — S_i = V_i I_i* から P_i と Q_i へ</a:t>
-            </a:r>
-          </a:p>
-        </p:txBody>
-      </p:sp>
-      <p:sp>
-        <p:nvSpPr>
-          <p:cNvPr id="3" name="TextBox 2"/>
-          <p:cNvSpPr txBox="1"/>
-          <p:nvPr/>
-        </p:nvSpPr>
-        <p:spPr>
-          <a:xfrm>
-            <a:off x="566928" y="2075212"/>
-            <a:ext cx="11057839" cy="254000"/>
+            <a:off x="566928" y="146304"/>
+            <a:ext cx="11057839" cy="457200"/>
           </a:xfrm>
           <a:prstGeom prst="rect">
             <a:avLst/>
@@ -11318,30 +10314,60 @@
           </a:bodyPr>
           <a:lstStyle/>
           <a:p>
-            <a:r>
-              <a:rPr sz="1600" b="1">
-                <a:solidFill>
-                  <a:srgbClr val="5C7268"/>
-                </a:solidFill>
-                <a:latin typeface="Avenir Next"/>
-                <a:ea typeface="Hiragino Sans"/>
-                <a:cs typeface="Hiragino Sans"/>
-              </a:rPr>
-              <a:t>① 複素電力｜S_i = P_i + jQ_i = V_i I_i*（第3回）</a:t>
-            </a:r>
-          </a:p>
-        </p:txBody>
-      </p:sp>
-      <p:sp>
-        <p:nvSpPr>
-          <p:cNvPr id="4" name="TextBox 3"/>
+            <a:pPr>
+              <a:defRPr sz="2400" b="1">
+                <a:solidFill>
+                  <a:srgbClr val="7C332A"/>
+                </a:solidFill>
+                <a:latin typeface="Avenir Next"/>
+                <a:ea typeface="Hiragino Sans"/>
+                <a:cs typeface="Hiragino Sans"/>
+              </a:defRPr>
+            </a:pPr>
+            <a:r>
+              <a:rPr>
+                <a:ea typeface="Hiragino Sans"/>
+                <a:cs typeface="Hiragino Sans"/>
+              </a:rPr>
+              <a:t>導出 — S_i = V_i I_i* から P_i と Q_i へ</a:t>
+            </a:r>
+          </a:p>
+        </p:txBody>
+      </p:sp>
+      <p:pic>
+        <p:nvPicPr>
+          <p:cNvPr id="3" name="Picture 2" descr="ch04_deriv_pq_2.png"/>
+          <p:cNvPicPr>
+            <a:picLocks noChangeAspect="1"/>
+          </p:cNvPicPr>
+          <p:nvPr/>
+        </p:nvPicPr>
+        <p:blipFill>
+          <a:blip r:embed="rId2"/>
+          <a:stretch>
+            <a:fillRect/>
+          </a:stretch>
+        </p:blipFill>
+        <p:spPr>
+          <a:xfrm>
+            <a:off x="762110" y="713232"/>
+            <a:ext cx="10667474" cy="5322316"/>
+          </a:xfrm>
+          <a:prstGeom prst="rect">
+            <a:avLst/>
+          </a:prstGeom>
+        </p:spPr>
+      </p:pic>
+      <p:sp>
+        <p:nvSpPr>
+          <p:cNvPr id="4" name="edge:caption"/>
           <p:cNvSpPr txBox="1"/>
           <p:nvPr/>
         </p:nvSpPr>
         <p:spPr>
           <a:xfrm>
-            <a:off x="822960" y="2367312"/>
-            <a:ext cx="10801807" cy="385762"/>
+            <a:off x="228600" y="6090412"/>
+            <a:ext cx="11734495" cy="520700"/>
           </a:xfrm>
           <a:prstGeom prst="rect">
             <a:avLst/>
@@ -11354,314 +10380,24 @@
           </a:bodyPr>
           <a:lstStyle/>
           <a:p>
-            <a:pPr>
-              <a:lnSpc>
-                <a:spcPct val="130000"/>
-              </a:lnSpc>
-            </a:pPr>
-            <a:r>
-              <a:rPr sz="1500">
-                <a:solidFill>
-                  <a:srgbClr val="33221E"/>
-                </a:solidFill>
-                <a:latin typeface="Avenir Next"/>
-                <a:ea typeface="Hiragino Sans"/>
-                <a:cs typeface="Hiragino Sans"/>
-              </a:rPr>
-              <a:t>母線 i に注入する電力。I_i は Ⅰ章の I_i = Σ_j Y_ij V_j で電圧に置き換わる。</a:t>
-            </a:r>
-          </a:p>
-        </p:txBody>
-      </p:sp>
-      <p:sp>
-        <p:nvSpPr>
-          <p:cNvPr id="5" name="Rectangle 4"/>
-          <p:cNvSpPr/>
-          <p:nvPr/>
-        </p:nvSpPr>
-        <p:spPr>
-          <a:xfrm>
-            <a:off x="566928" y="2904966"/>
-            <a:ext cx="11057839" cy="9525"/>
-          </a:xfrm>
-          <a:prstGeom prst="rect">
-            <a:avLst/>
-          </a:prstGeom>
-          <a:solidFill>
-            <a:srgbClr val="E5DCCE"/>
-          </a:solidFill>
-          <a:ln>
-            <a:noFill/>
-          </a:ln>
-          <a:effectLst/>
-        </p:spPr>
-        <p:style>
-          <a:lnRef idx="1">
-            <a:schemeClr val="accent1"/>
-          </a:lnRef>
-          <a:fillRef idx="3">
-            <a:schemeClr val="accent1"/>
-          </a:fillRef>
-          <a:effectRef idx="2">
-            <a:schemeClr val="accent1"/>
-          </a:effectRef>
-          <a:fontRef idx="minor">
-            <a:schemeClr val="lt1"/>
-          </a:fontRef>
-        </p:style>
-        <p:txBody>
-          <a:bodyPr rtlCol="0" anchor="ctr"/>
-          <a:lstStyle/>
-          <a:p>
             <a:pPr algn="ctr"/>
-          </a:p>
-        </p:txBody>
-      </p:sp>
-      <p:sp>
-        <p:nvSpPr>
-          <p:cNvPr id="6" name="TextBox 5"/>
-          <p:cNvSpPr txBox="1"/>
-          <p:nvPr/>
-        </p:nvSpPr>
-        <p:spPr>
-          <a:xfrm>
-            <a:off x="566928" y="3082258"/>
-            <a:ext cx="11057839" cy="254000"/>
-          </a:xfrm>
-          <a:prstGeom prst="rect">
-            <a:avLst/>
-          </a:prstGeom>
-          <a:noFill/>
-        </p:spPr>
-        <p:txBody>
-          <a:bodyPr wrap="none" lIns="0" rIns="0" tIns="0" bIns="0">
-            <a:noAutofit/>
-          </a:bodyPr>
-          <a:lstStyle/>
-          <a:p>
-            <a:r>
-              <a:rPr sz="1600" b="1">
-                <a:solidFill>
-                  <a:srgbClr val="5C7268"/>
-                </a:solidFill>
-                <a:latin typeface="Avenir Next"/>
-                <a:ea typeface="Hiragino Sans"/>
-                <a:cs typeface="Hiragino Sans"/>
-              </a:rPr>
-              <a:t>② 代入｜S_i = V_i Σ_j Y_ij* V_j*</a:t>
-            </a:r>
-          </a:p>
-        </p:txBody>
-      </p:sp>
-      <p:sp>
-        <p:nvSpPr>
-          <p:cNvPr id="7" name="TextBox 6"/>
-          <p:cNvSpPr txBox="1"/>
-          <p:nvPr/>
-        </p:nvSpPr>
-        <p:spPr>
-          <a:xfrm>
-            <a:off x="822960" y="3374358"/>
-            <a:ext cx="10801807" cy="695325"/>
-          </a:xfrm>
-          <a:prstGeom prst="rect">
-            <a:avLst/>
-          </a:prstGeom>
-          <a:noFill/>
-        </p:spPr>
-        <p:txBody>
-          <a:bodyPr wrap="square" lIns="0" rIns="0" tIns="0" bIns="0">
-            <a:noAutofit/>
-          </a:bodyPr>
-          <a:lstStyle/>
-          <a:p>
-            <a:pPr>
-              <a:lnSpc>
-                <a:spcPct val="130000"/>
-              </a:lnSpc>
-            </a:pPr>
-            <a:r>
-              <a:rPr sz="1500">
-                <a:solidFill>
-                  <a:srgbClr val="33221E"/>
-                </a:solidFill>
-                <a:latin typeface="Avenir Next"/>
-                <a:ea typeface="Hiragino Sans"/>
-                <a:cs typeface="Hiragino Sans"/>
-              </a:rPr>
-              <a:t>極形式 V_i = V_i e^{jθ_i}、Y_ij = G_ij + jB_ij を入れると S_i = Σ_j V_i V_j (G_ij − jB_ij) e^{j(θ_i − θ_j)}。</a:t>
-            </a:r>
-            <a:r>
-              <a:rPr sz="1500" b="1">
-                <a:solidFill>
-                  <a:srgbClr val="33221E"/>
-                </a:solidFill>
-                <a:latin typeface="Avenir Next"/>
-                <a:ea typeface="Hiragino Sans"/>
-                <a:cs typeface="Hiragino Sans"/>
-              </a:rPr>
-              <a:t>電圧の積 V_i V_j</a:t>
-            </a:r>
-            <a:r>
-              <a:rPr sz="1500">
-                <a:solidFill>
-                  <a:srgbClr val="33221E"/>
-                </a:solidFill>
-                <a:latin typeface="Avenir Next"/>
-                <a:ea typeface="Hiragino Sans"/>
-                <a:cs typeface="Hiragino Sans"/>
-              </a:rPr>
-              <a:t> がここで生まれる。</a:t>
-            </a:r>
-          </a:p>
-        </p:txBody>
-      </p:sp>
-      <p:sp>
-        <p:nvSpPr>
-          <p:cNvPr id="8" name="Rectangle 7"/>
-          <p:cNvSpPr/>
-          <p:nvPr/>
-        </p:nvSpPr>
-        <p:spPr>
-          <a:xfrm>
-            <a:off x="566928" y="4221575"/>
-            <a:ext cx="11057839" cy="9525"/>
-          </a:xfrm>
-          <a:prstGeom prst="rect">
-            <a:avLst/>
-          </a:prstGeom>
-          <a:solidFill>
-            <a:srgbClr val="E5DCCE"/>
-          </a:solidFill>
-          <a:ln>
-            <a:noFill/>
-          </a:ln>
-          <a:effectLst/>
-        </p:spPr>
-        <p:style>
-          <a:lnRef idx="1">
-            <a:schemeClr val="accent1"/>
-          </a:lnRef>
-          <a:fillRef idx="3">
-            <a:schemeClr val="accent1"/>
-          </a:fillRef>
-          <a:effectRef idx="2">
-            <a:schemeClr val="accent1"/>
-          </a:effectRef>
-          <a:fontRef idx="minor">
-            <a:schemeClr val="lt1"/>
-          </a:fontRef>
-        </p:style>
-        <p:txBody>
-          <a:bodyPr rtlCol="0" anchor="ctr"/>
-          <a:lstStyle/>
-          <a:p>
-            <a:pPr algn="ctr"/>
-          </a:p>
-        </p:txBody>
-      </p:sp>
-      <p:sp>
-        <p:nvSpPr>
-          <p:cNvPr id="9" name="build:ghost"/>
-          <p:cNvSpPr txBox="1"/>
-          <p:nvPr/>
-        </p:nvSpPr>
-        <p:spPr>
-          <a:xfrm>
-            <a:off x="566928" y="4398867"/>
-            <a:ext cx="11057839" cy="254000"/>
-          </a:xfrm>
-          <a:prstGeom prst="rect">
-            <a:avLst/>
-          </a:prstGeom>
-          <a:noFill/>
-        </p:spPr>
-        <p:txBody>
-          <a:bodyPr wrap="none" lIns="0" rIns="0" tIns="0" bIns="0">
-            <a:noAutofit/>
-          </a:bodyPr>
-          <a:lstStyle/>
-          <a:p>
-            <a:r>
-              <a:rPr sz="1600" b="1">
-                <a:solidFill>
-                  <a:srgbClr val="C1C9C5"/>
-                </a:solidFill>
-                <a:latin typeface="Avenir Next"/>
-                <a:ea typeface="Hiragino Sans"/>
-                <a:cs typeface="Hiragino Sans"/>
-              </a:rPr>
-              <a:t>③ オイラー｜e^{jθ_ij} = cos θ_ij + j sin θ_ij で実部と虚部に分ける</a:t>
-            </a:r>
-          </a:p>
-        </p:txBody>
-      </p:sp>
-      <p:sp>
-        <p:nvSpPr>
-          <p:cNvPr id="10" name="build:ghost"/>
-          <p:cNvSpPr txBox="1"/>
-          <p:nvPr/>
-        </p:nvSpPr>
-        <p:spPr>
-          <a:xfrm>
-            <a:off x="822960" y="4690967"/>
-            <a:ext cx="10801807" cy="695325"/>
-          </a:xfrm>
-          <a:prstGeom prst="rect">
-            <a:avLst/>
-          </a:prstGeom>
-          <a:noFill/>
-        </p:spPr>
-        <p:txBody>
-          <a:bodyPr wrap="square" lIns="0" rIns="0" tIns="0" bIns="0">
-            <a:noAutofit/>
-          </a:bodyPr>
-          <a:lstStyle/>
-          <a:p>
-            <a:pPr>
-              <a:lnSpc>
-                <a:spcPct val="130000"/>
-              </a:lnSpc>
-            </a:pPr>
-            <a:r>
-              <a:rPr sz="1500">
-                <a:solidFill>
-                  <a:srgbClr val="C1BCBB"/>
-                </a:solidFill>
-                <a:latin typeface="Avenir Next"/>
-                <a:ea typeface="Hiragino Sans"/>
-                <a:cs typeface="Hiragino Sans"/>
-              </a:rPr>
-              <a:t>P_i = V_i Σ_j V_j (G_ij cos θ_ij + B_ij sin θ_ij)、Q_i = V_i Σ_j V_j (G_ij sin θ_ij − B_ij cos θ_ij)。母線ごとに </a:t>
-            </a:r>
-            <a:r>
-              <a:rPr sz="1500" b="1">
-                <a:solidFill>
-                  <a:srgbClr val="C1BCBB"/>
-                </a:solidFill>
-                <a:latin typeface="Avenir Next"/>
-                <a:ea typeface="Hiragino Sans"/>
-                <a:cs typeface="Hiragino Sans"/>
-              </a:rPr>
-              <a:t>P の式と Q の式が 1 本ずつ</a:t>
-            </a:r>
-            <a:r>
-              <a:rPr sz="1500">
-                <a:solidFill>
-                  <a:srgbClr val="C1BCBB"/>
-                </a:solidFill>
-                <a:latin typeface="Avenir Next"/>
-                <a:ea typeface="Hiragino Sans"/>
-                <a:cs typeface="Hiragino Sans"/>
-              </a:rPr>
-              <a:t>。</a:t>
-            </a:r>
-          </a:p>
-        </p:txBody>
-      </p:sp>
-      <p:sp>
-        <p:nvSpPr>
-          <p:cNvPr id="11" name="TextBox 10"/>
+            <a:r>
+              <a:rPr sz="1400">
+                <a:solidFill>
+                  <a:srgbClr val="71635B"/>
+                </a:solidFill>
+                <a:latin typeface="Avenir Next"/>
+                <a:ea typeface="Hiragino Sans"/>
+                <a:cs typeface="Hiragino Sans"/>
+              </a:rPr>
+              <a:t>極形式 V_i = V_i e^{jθ_i}、Y_ij = G_ij + jB_ij を入れると S_i = Σ_j V_i V_j (G_ij − jB_ij) e^{j(θ_i − θ_j)}。電圧の積 V_i V_j がここで生まれる。　出典｜コード/fig_ch04.py</a:t>
+            </a:r>
+          </a:p>
+        </p:txBody>
+      </p:sp>
+      <p:sp>
+        <p:nvSpPr>
+          <p:cNvPr id="5" name="TextBox 4"/>
           <p:cNvSpPr txBox="1"/>
           <p:nvPr/>
         </p:nvSpPr>
@@ -11717,59 +10453,14 @@
       <p:grpSpPr/>
       <p:sp>
         <p:nvSpPr>
-          <p:cNvPr id="2" name="TextBox 1"/>
+          <p:cNvPr id="2" name="edge:title"/>
           <p:cNvSpPr txBox="1"/>
           <p:nvPr/>
         </p:nvSpPr>
         <p:spPr>
           <a:xfrm>
-            <a:off x="566928" y="457200"/>
-            <a:ext cx="11057839" cy="658368"/>
-          </a:xfrm>
-          <a:prstGeom prst="rect">
-            <a:avLst/>
-          </a:prstGeom>
-          <a:noFill/>
-        </p:spPr>
-        <p:txBody>
-          <a:bodyPr wrap="square" lIns="0" rIns="0" tIns="0" bIns="0" anchor="ctr">
-            <a:noAutofit/>
-          </a:bodyPr>
-          <a:lstStyle/>
-          <a:p>
-            <a:pPr>
-              <a:lnSpc>
-                <a:spcPct val="106000"/>
-              </a:lnSpc>
-              <a:defRPr sz="3390" b="1">
-                <a:solidFill>
-                  <a:srgbClr val="7C332A"/>
-                </a:solidFill>
-                <a:latin typeface="Avenir Next"/>
-                <a:ea typeface="Hiragino Sans"/>
-                <a:cs typeface="Hiragino Sans"/>
-              </a:defRPr>
-            </a:pPr>
-            <a:r>
-              <a:rPr>
-                <a:ea typeface="Hiragino Sans"/>
-                <a:cs typeface="Hiragino Sans"/>
-              </a:rPr>
-              <a:t>導出 — S_i = V_i I_i* から P_i と Q_i へ</a:t>
-            </a:r>
-          </a:p>
-        </p:txBody>
-      </p:sp>
-      <p:sp>
-        <p:nvSpPr>
-          <p:cNvPr id="3" name="TextBox 2"/>
-          <p:cNvSpPr txBox="1"/>
-          <p:nvPr/>
-        </p:nvSpPr>
-        <p:spPr>
-          <a:xfrm>
-            <a:off x="566928" y="2075212"/>
-            <a:ext cx="11057839" cy="254000"/>
+            <a:off x="566928" y="146304"/>
+            <a:ext cx="11057839" cy="457200"/>
           </a:xfrm>
           <a:prstGeom prst="rect">
             <a:avLst/>
@@ -11782,30 +10473,60 @@
           </a:bodyPr>
           <a:lstStyle/>
           <a:p>
-            <a:r>
-              <a:rPr sz="1600" b="1">
-                <a:solidFill>
-                  <a:srgbClr val="5C7268"/>
-                </a:solidFill>
-                <a:latin typeface="Avenir Next"/>
-                <a:ea typeface="Hiragino Sans"/>
-                <a:cs typeface="Hiragino Sans"/>
-              </a:rPr>
-              <a:t>① 複素電力｜S_i = P_i + jQ_i = V_i I_i*（第3回）</a:t>
-            </a:r>
-          </a:p>
-        </p:txBody>
-      </p:sp>
-      <p:sp>
-        <p:nvSpPr>
-          <p:cNvPr id="4" name="TextBox 3"/>
+            <a:pPr>
+              <a:defRPr sz="2400" b="1">
+                <a:solidFill>
+                  <a:srgbClr val="7C332A"/>
+                </a:solidFill>
+                <a:latin typeface="Avenir Next"/>
+                <a:ea typeface="Hiragino Sans"/>
+                <a:cs typeface="Hiragino Sans"/>
+              </a:defRPr>
+            </a:pPr>
+            <a:r>
+              <a:rPr>
+                <a:ea typeface="Hiragino Sans"/>
+                <a:cs typeface="Hiragino Sans"/>
+              </a:rPr>
+              <a:t>導出 — S_i = V_i I_i* から P_i と Q_i へ</a:t>
+            </a:r>
+          </a:p>
+        </p:txBody>
+      </p:sp>
+      <p:pic>
+        <p:nvPicPr>
+          <p:cNvPr id="3" name="Picture 2" descr="ch04_deriv_pq_3.png"/>
+          <p:cNvPicPr>
+            <a:picLocks noChangeAspect="1"/>
+          </p:cNvPicPr>
+          <p:nvPr/>
+        </p:nvPicPr>
+        <p:blipFill>
+          <a:blip r:embed="rId2"/>
+          <a:stretch>
+            <a:fillRect/>
+          </a:stretch>
+        </p:blipFill>
+        <p:spPr>
+          <a:xfrm>
+            <a:off x="762110" y="713232"/>
+            <a:ext cx="10667474" cy="5322316"/>
+          </a:xfrm>
+          <a:prstGeom prst="rect">
+            <a:avLst/>
+          </a:prstGeom>
+        </p:spPr>
+      </p:pic>
+      <p:sp>
+        <p:nvSpPr>
+          <p:cNvPr id="4" name="edge:caption"/>
           <p:cNvSpPr txBox="1"/>
           <p:nvPr/>
         </p:nvSpPr>
         <p:spPr>
           <a:xfrm>
-            <a:off x="822960" y="2367312"/>
-            <a:ext cx="10801807" cy="385762"/>
+            <a:off x="228600" y="6090412"/>
+            <a:ext cx="11734495" cy="520700"/>
           </a:xfrm>
           <a:prstGeom prst="rect">
             <a:avLst/>
@@ -11818,314 +10539,24 @@
           </a:bodyPr>
           <a:lstStyle/>
           <a:p>
-            <a:pPr>
-              <a:lnSpc>
-                <a:spcPct val="130000"/>
-              </a:lnSpc>
-            </a:pPr>
-            <a:r>
-              <a:rPr sz="1500">
-                <a:solidFill>
-                  <a:srgbClr val="33221E"/>
-                </a:solidFill>
-                <a:latin typeface="Avenir Next"/>
-                <a:ea typeface="Hiragino Sans"/>
-                <a:cs typeface="Hiragino Sans"/>
-              </a:rPr>
-              <a:t>母線 i に注入する電力。I_i は Ⅰ章の I_i = Σ_j Y_ij V_j で電圧に置き換わる。</a:t>
-            </a:r>
-          </a:p>
-        </p:txBody>
-      </p:sp>
-      <p:sp>
-        <p:nvSpPr>
-          <p:cNvPr id="5" name="Rectangle 4"/>
-          <p:cNvSpPr/>
-          <p:nvPr/>
-        </p:nvSpPr>
-        <p:spPr>
-          <a:xfrm>
-            <a:off x="566928" y="2904966"/>
-            <a:ext cx="11057839" cy="9525"/>
-          </a:xfrm>
-          <a:prstGeom prst="rect">
-            <a:avLst/>
-          </a:prstGeom>
-          <a:solidFill>
-            <a:srgbClr val="E5DCCE"/>
-          </a:solidFill>
-          <a:ln>
-            <a:noFill/>
-          </a:ln>
-          <a:effectLst/>
-        </p:spPr>
-        <p:style>
-          <a:lnRef idx="1">
-            <a:schemeClr val="accent1"/>
-          </a:lnRef>
-          <a:fillRef idx="3">
-            <a:schemeClr val="accent1"/>
-          </a:fillRef>
-          <a:effectRef idx="2">
-            <a:schemeClr val="accent1"/>
-          </a:effectRef>
-          <a:fontRef idx="minor">
-            <a:schemeClr val="lt1"/>
-          </a:fontRef>
-        </p:style>
-        <p:txBody>
-          <a:bodyPr rtlCol="0" anchor="ctr"/>
-          <a:lstStyle/>
-          <a:p>
             <a:pPr algn="ctr"/>
-          </a:p>
-        </p:txBody>
-      </p:sp>
-      <p:sp>
-        <p:nvSpPr>
-          <p:cNvPr id="6" name="TextBox 5"/>
-          <p:cNvSpPr txBox="1"/>
-          <p:nvPr/>
-        </p:nvSpPr>
-        <p:spPr>
-          <a:xfrm>
-            <a:off x="566928" y="3082258"/>
-            <a:ext cx="11057839" cy="254000"/>
-          </a:xfrm>
-          <a:prstGeom prst="rect">
-            <a:avLst/>
-          </a:prstGeom>
-          <a:noFill/>
-        </p:spPr>
-        <p:txBody>
-          <a:bodyPr wrap="none" lIns="0" rIns="0" tIns="0" bIns="0">
-            <a:noAutofit/>
-          </a:bodyPr>
-          <a:lstStyle/>
-          <a:p>
-            <a:r>
-              <a:rPr sz="1600" b="1">
-                <a:solidFill>
-                  <a:srgbClr val="5C7268"/>
-                </a:solidFill>
-                <a:latin typeface="Avenir Next"/>
-                <a:ea typeface="Hiragino Sans"/>
-                <a:cs typeface="Hiragino Sans"/>
-              </a:rPr>
-              <a:t>② 代入｜S_i = V_i Σ_j Y_ij* V_j*</a:t>
-            </a:r>
-          </a:p>
-        </p:txBody>
-      </p:sp>
-      <p:sp>
-        <p:nvSpPr>
-          <p:cNvPr id="7" name="TextBox 6"/>
-          <p:cNvSpPr txBox="1"/>
-          <p:nvPr/>
-        </p:nvSpPr>
-        <p:spPr>
-          <a:xfrm>
-            <a:off x="822960" y="3374358"/>
-            <a:ext cx="10801807" cy="695325"/>
-          </a:xfrm>
-          <a:prstGeom prst="rect">
-            <a:avLst/>
-          </a:prstGeom>
-          <a:noFill/>
-        </p:spPr>
-        <p:txBody>
-          <a:bodyPr wrap="square" lIns="0" rIns="0" tIns="0" bIns="0">
-            <a:noAutofit/>
-          </a:bodyPr>
-          <a:lstStyle/>
-          <a:p>
-            <a:pPr>
-              <a:lnSpc>
-                <a:spcPct val="130000"/>
-              </a:lnSpc>
-            </a:pPr>
-            <a:r>
-              <a:rPr sz="1500">
-                <a:solidFill>
-                  <a:srgbClr val="33221E"/>
-                </a:solidFill>
-                <a:latin typeface="Avenir Next"/>
-                <a:ea typeface="Hiragino Sans"/>
-                <a:cs typeface="Hiragino Sans"/>
-              </a:rPr>
-              <a:t>極形式 V_i = V_i e^{jθ_i}、Y_ij = G_ij + jB_ij を入れると S_i = Σ_j V_i V_j (G_ij − jB_ij) e^{j(θ_i − θ_j)}。</a:t>
-            </a:r>
-            <a:r>
-              <a:rPr sz="1500" b="1">
-                <a:solidFill>
-                  <a:srgbClr val="33221E"/>
-                </a:solidFill>
-                <a:latin typeface="Avenir Next"/>
-                <a:ea typeface="Hiragino Sans"/>
-                <a:cs typeface="Hiragino Sans"/>
-              </a:rPr>
-              <a:t>電圧の積 V_i V_j</a:t>
-            </a:r>
-            <a:r>
-              <a:rPr sz="1500">
-                <a:solidFill>
-                  <a:srgbClr val="33221E"/>
-                </a:solidFill>
-                <a:latin typeface="Avenir Next"/>
-                <a:ea typeface="Hiragino Sans"/>
-                <a:cs typeface="Hiragino Sans"/>
-              </a:rPr>
-              <a:t> がここで生まれる。</a:t>
-            </a:r>
-          </a:p>
-        </p:txBody>
-      </p:sp>
-      <p:sp>
-        <p:nvSpPr>
-          <p:cNvPr id="8" name="Rectangle 7"/>
-          <p:cNvSpPr/>
-          <p:nvPr/>
-        </p:nvSpPr>
-        <p:spPr>
-          <a:xfrm>
-            <a:off x="566928" y="4221575"/>
-            <a:ext cx="11057839" cy="9525"/>
-          </a:xfrm>
-          <a:prstGeom prst="rect">
-            <a:avLst/>
-          </a:prstGeom>
-          <a:solidFill>
-            <a:srgbClr val="E5DCCE"/>
-          </a:solidFill>
-          <a:ln>
-            <a:noFill/>
-          </a:ln>
-          <a:effectLst/>
-        </p:spPr>
-        <p:style>
-          <a:lnRef idx="1">
-            <a:schemeClr val="accent1"/>
-          </a:lnRef>
-          <a:fillRef idx="3">
-            <a:schemeClr val="accent1"/>
-          </a:fillRef>
-          <a:effectRef idx="2">
-            <a:schemeClr val="accent1"/>
-          </a:effectRef>
-          <a:fontRef idx="minor">
-            <a:schemeClr val="lt1"/>
-          </a:fontRef>
-        </p:style>
-        <p:txBody>
-          <a:bodyPr rtlCol="0" anchor="ctr"/>
-          <a:lstStyle/>
-          <a:p>
-            <a:pPr algn="ctr"/>
-          </a:p>
-        </p:txBody>
-      </p:sp>
-      <p:sp>
-        <p:nvSpPr>
-          <p:cNvPr id="9" name="TextBox 8"/>
-          <p:cNvSpPr txBox="1"/>
-          <p:nvPr/>
-        </p:nvSpPr>
-        <p:spPr>
-          <a:xfrm>
-            <a:off x="566928" y="4398867"/>
-            <a:ext cx="11057839" cy="254000"/>
-          </a:xfrm>
-          <a:prstGeom prst="rect">
-            <a:avLst/>
-          </a:prstGeom>
-          <a:noFill/>
-        </p:spPr>
-        <p:txBody>
-          <a:bodyPr wrap="none" lIns="0" rIns="0" tIns="0" bIns="0">
-            <a:noAutofit/>
-          </a:bodyPr>
-          <a:lstStyle/>
-          <a:p>
-            <a:r>
-              <a:rPr sz="1600" b="1">
-                <a:solidFill>
-                  <a:srgbClr val="5C7268"/>
-                </a:solidFill>
-                <a:latin typeface="Avenir Next"/>
-                <a:ea typeface="Hiragino Sans"/>
-                <a:cs typeface="Hiragino Sans"/>
-              </a:rPr>
-              <a:t>③ オイラー｜e^{jθ_ij} = cos θ_ij + j sin θ_ij で実部と虚部に分ける</a:t>
-            </a:r>
-          </a:p>
-        </p:txBody>
-      </p:sp>
-      <p:sp>
-        <p:nvSpPr>
-          <p:cNvPr id="10" name="TextBox 9"/>
-          <p:cNvSpPr txBox="1"/>
-          <p:nvPr/>
-        </p:nvSpPr>
-        <p:spPr>
-          <a:xfrm>
-            <a:off x="822960" y="4690967"/>
-            <a:ext cx="10801807" cy="695325"/>
-          </a:xfrm>
-          <a:prstGeom prst="rect">
-            <a:avLst/>
-          </a:prstGeom>
-          <a:noFill/>
-        </p:spPr>
-        <p:txBody>
-          <a:bodyPr wrap="square" lIns="0" rIns="0" tIns="0" bIns="0">
-            <a:noAutofit/>
-          </a:bodyPr>
-          <a:lstStyle/>
-          <a:p>
-            <a:pPr>
-              <a:lnSpc>
-                <a:spcPct val="130000"/>
-              </a:lnSpc>
-            </a:pPr>
-            <a:r>
-              <a:rPr sz="1500">
-                <a:solidFill>
-                  <a:srgbClr val="33221E"/>
-                </a:solidFill>
-                <a:latin typeface="Avenir Next"/>
-                <a:ea typeface="Hiragino Sans"/>
-                <a:cs typeface="Hiragino Sans"/>
-              </a:rPr>
-              <a:t>P_i = V_i Σ_j V_j (G_ij cos θ_ij + B_ij sin θ_ij)、Q_i = V_i Σ_j V_j (G_ij sin θ_ij − B_ij cos θ_ij)。母線ごとに </a:t>
-            </a:r>
-            <a:r>
-              <a:rPr sz="1500" b="1">
-                <a:solidFill>
-                  <a:srgbClr val="33221E"/>
-                </a:solidFill>
-                <a:latin typeface="Avenir Next"/>
-                <a:ea typeface="Hiragino Sans"/>
-                <a:cs typeface="Hiragino Sans"/>
-              </a:rPr>
-              <a:t>P の式と Q の式が 1 本ずつ</a:t>
-            </a:r>
-            <a:r>
-              <a:rPr sz="1500">
-                <a:solidFill>
-                  <a:srgbClr val="33221E"/>
-                </a:solidFill>
-                <a:latin typeface="Avenir Next"/>
-                <a:ea typeface="Hiragino Sans"/>
-                <a:cs typeface="Hiragino Sans"/>
-              </a:rPr>
-              <a:t>。</a:t>
-            </a:r>
-          </a:p>
-        </p:txBody>
-      </p:sp>
-      <p:sp>
-        <p:nvSpPr>
-          <p:cNvPr id="11" name="TextBox 10"/>
+            <a:r>
+              <a:rPr sz="1400">
+                <a:solidFill>
+                  <a:srgbClr val="71635B"/>
+                </a:solidFill>
+                <a:latin typeface="Avenir Next"/>
+                <a:ea typeface="Hiragino Sans"/>
+                <a:cs typeface="Hiragino Sans"/>
+              </a:rPr>
+              <a:t>P_i = V_i Σ_j V_j (G_ij cos θ_ij + B_ij sin θ_ij)、Q_i = V_i Σ_j V_j (G_ij sin θ_ij − B_ij cos θ_ij)。母線ごとに P の式と Q の式が 1 本ずつ。　出典｜コード/fig_ch04.py</a:t>
+            </a:r>
+          </a:p>
+        </p:txBody>
+      </p:sp>
+      <p:sp>
+        <p:nvSpPr>
+          <p:cNvPr id="5" name="TextBox 4"/>
           <p:cNvSpPr txBox="1"/>
           <p:nvPr/>
         </p:nvSpPr>
@@ -19069,59 +17500,14 @@
       <p:grpSpPr/>
       <p:sp>
         <p:nvSpPr>
-          <p:cNvPr id="2" name="TextBox 1"/>
+          <p:cNvPr id="2" name="edge:title"/>
           <p:cNvSpPr txBox="1"/>
           <p:nvPr/>
         </p:nvSpPr>
         <p:spPr>
           <a:xfrm>
-            <a:off x="566928" y="457200"/>
-            <a:ext cx="11057839" cy="658368"/>
-          </a:xfrm>
-          <a:prstGeom prst="rect">
-            <a:avLst/>
-          </a:prstGeom>
-          <a:noFill/>
-        </p:spPr>
-        <p:txBody>
-          <a:bodyPr wrap="square" lIns="0" rIns="0" tIns="0" bIns="0" anchor="ctr">
-            <a:noAutofit/>
-          </a:bodyPr>
-          <a:lstStyle/>
-          <a:p>
-            <a:pPr>
-              <a:lnSpc>
-                <a:spcPct val="106000"/>
-              </a:lnSpc>
-              <a:defRPr sz="3390" b="1">
-                <a:solidFill>
-                  <a:srgbClr val="7C332A"/>
-                </a:solidFill>
-                <a:latin typeface="Avenir Next"/>
-                <a:ea typeface="Hiragino Sans"/>
-                <a:cs typeface="Hiragino Sans"/>
-              </a:defRPr>
-            </a:pPr>
-            <a:r>
-              <a:rPr>
-                <a:ea typeface="Hiragino Sans"/>
-                <a:cs typeface="Hiragino Sans"/>
-              </a:rPr>
-              <a:t>導出 — 3 つの近似で P = B′θ</a:t>
-            </a:r>
-          </a:p>
-        </p:txBody>
-      </p:sp>
-      <p:sp>
-        <p:nvSpPr>
-          <p:cNvPr id="3" name="TextBox 2"/>
-          <p:cNvSpPr txBox="1"/>
-          <p:nvPr/>
-        </p:nvSpPr>
-        <p:spPr>
-          <a:xfrm>
-            <a:off x="566928" y="2229993"/>
-            <a:ext cx="11057839" cy="254000"/>
+            <a:off x="566928" y="146304"/>
+            <a:ext cx="11057839" cy="457200"/>
           </a:xfrm>
           <a:prstGeom prst="rect">
             <a:avLst/>
@@ -19134,30 +17520,60 @@
           </a:bodyPr>
           <a:lstStyle/>
           <a:p>
-            <a:r>
-              <a:rPr sz="1600" b="1">
-                <a:solidFill>
-                  <a:srgbClr val="5C7268"/>
-                </a:solidFill>
-                <a:latin typeface="Avenir Next"/>
-                <a:ea typeface="Hiragino Sans"/>
-                <a:cs typeface="Hiragino Sans"/>
-              </a:rPr>
-              <a:t>近似 1｜R ≈ 0、対地アドミタンスも無視 → G = 0</a:t>
-            </a:r>
-          </a:p>
-        </p:txBody>
-      </p:sp>
-      <p:sp>
-        <p:nvSpPr>
-          <p:cNvPr id="4" name="TextBox 3"/>
+            <a:pPr>
+              <a:defRPr sz="2400" b="1">
+                <a:solidFill>
+                  <a:srgbClr val="7C332A"/>
+                </a:solidFill>
+                <a:latin typeface="Avenir Next"/>
+                <a:ea typeface="Hiragino Sans"/>
+                <a:cs typeface="Hiragino Sans"/>
+              </a:defRPr>
+            </a:pPr>
+            <a:r>
+              <a:rPr>
+                <a:ea typeface="Hiragino Sans"/>
+                <a:cs typeface="Hiragino Sans"/>
+              </a:rPr>
+              <a:t>導出 — 3 つの近似で P = B′θ</a:t>
+            </a:r>
+          </a:p>
+        </p:txBody>
+      </p:sp>
+      <p:pic>
+        <p:nvPicPr>
+          <p:cNvPr id="3" name="Picture 2" descr="ch04_deriv_dcpf_1.png"/>
+          <p:cNvPicPr>
+            <a:picLocks noChangeAspect="1"/>
+          </p:cNvPicPr>
+          <p:nvPr/>
+        </p:nvPicPr>
+        <p:blipFill>
+          <a:blip r:embed="rId2"/>
+          <a:stretch>
+            <a:fillRect/>
+          </a:stretch>
+        </p:blipFill>
+        <p:spPr>
+          <a:xfrm>
+            <a:off x="762110" y="713232"/>
+            <a:ext cx="10667474" cy="5322316"/>
+          </a:xfrm>
+          <a:prstGeom prst="rect">
+            <a:avLst/>
+          </a:prstGeom>
+        </p:spPr>
+      </p:pic>
+      <p:sp>
+        <p:nvSpPr>
+          <p:cNvPr id="4" name="edge:caption"/>
           <p:cNvSpPr txBox="1"/>
           <p:nvPr/>
         </p:nvSpPr>
         <p:spPr>
           <a:xfrm>
-            <a:off x="822960" y="2522093"/>
-            <a:ext cx="10801807" cy="385762"/>
+            <a:off x="228600" y="6090412"/>
+            <a:ext cx="11734495" cy="520700"/>
           </a:xfrm>
           <a:prstGeom prst="rect">
             <a:avLst/>
@@ -19170,336 +17586,24 @@
           </a:bodyPr>
           <a:lstStyle/>
           <a:p>
-            <a:pPr>
-              <a:lnSpc>
-                <a:spcPct val="130000"/>
-              </a:lnSpc>
-            </a:pPr>
-            <a:r>
-              <a:rPr sz="1500">
-                <a:solidFill>
-                  <a:srgbClr val="33221E"/>
-                </a:solidFill>
-                <a:latin typeface="Avenir Next"/>
-                <a:ea typeface="Hiragino Sans"/>
-                <a:cs typeface="Hiragino Sans"/>
-              </a:rPr>
-              <a:t>架空送電線は X/R ≈ 5〜15（第3回）。Y_bus = jB となり、P_i = V_i Σ_j V_j B_ij sin θ_ij。</a:t>
-            </a:r>
-            <a:r>
-              <a:rPr sz="1500" b="1">
-                <a:solidFill>
-                  <a:srgbClr val="33221E"/>
-                </a:solidFill>
-                <a:latin typeface="Avenir Next"/>
-                <a:ea typeface="Hiragino Sans"/>
-                <a:cs typeface="Hiragino Sans"/>
-              </a:rPr>
-              <a:t>cos の項（Q 側）が消える</a:t>
-            </a:r>
-            <a:r>
-              <a:rPr sz="1500">
-                <a:solidFill>
-                  <a:srgbClr val="33221E"/>
-                </a:solidFill>
-                <a:latin typeface="Avenir Next"/>
-                <a:ea typeface="Hiragino Sans"/>
-                <a:cs typeface="Hiragino Sans"/>
-              </a:rPr>
-              <a:t>。</a:t>
-            </a:r>
-          </a:p>
-        </p:txBody>
-      </p:sp>
-      <p:sp>
-        <p:nvSpPr>
-          <p:cNvPr id="5" name="Rectangle 4"/>
-          <p:cNvSpPr/>
-          <p:nvPr/>
-        </p:nvSpPr>
-        <p:spPr>
-          <a:xfrm>
-            <a:off x="566928" y="3059747"/>
-            <a:ext cx="11057839" cy="9525"/>
-          </a:xfrm>
-          <a:prstGeom prst="rect">
-            <a:avLst/>
-          </a:prstGeom>
-          <a:solidFill>
-            <a:srgbClr val="E5DCCE"/>
-          </a:solidFill>
-          <a:ln>
-            <a:noFill/>
-          </a:ln>
-          <a:effectLst/>
-        </p:spPr>
-        <p:style>
-          <a:lnRef idx="1">
-            <a:schemeClr val="accent1"/>
-          </a:lnRef>
-          <a:fillRef idx="3">
-            <a:schemeClr val="accent1"/>
-          </a:fillRef>
-          <a:effectRef idx="2">
-            <a:schemeClr val="accent1"/>
-          </a:effectRef>
-          <a:fontRef idx="minor">
-            <a:schemeClr val="lt1"/>
-          </a:fontRef>
-        </p:style>
-        <p:txBody>
-          <a:bodyPr rtlCol="0" anchor="ctr"/>
-          <a:lstStyle/>
-          <a:p>
             <a:pPr algn="ctr"/>
-          </a:p>
-        </p:txBody>
-      </p:sp>
-      <p:sp>
-        <p:nvSpPr>
-          <p:cNvPr id="6" name="build:ghost"/>
-          <p:cNvSpPr txBox="1"/>
-          <p:nvPr/>
-        </p:nvSpPr>
-        <p:spPr>
-          <a:xfrm>
-            <a:off x="566928" y="3237039"/>
-            <a:ext cx="11057839" cy="254000"/>
-          </a:xfrm>
-          <a:prstGeom prst="rect">
-            <a:avLst/>
-          </a:prstGeom>
-          <a:noFill/>
-        </p:spPr>
-        <p:txBody>
-          <a:bodyPr wrap="none" lIns="0" rIns="0" tIns="0" bIns="0">
-            <a:noAutofit/>
-          </a:bodyPr>
-          <a:lstStyle/>
-          <a:p>
-            <a:r>
-              <a:rPr sz="1600" b="1">
-                <a:solidFill>
-                  <a:srgbClr val="C1C9C5"/>
-                </a:solidFill>
-                <a:latin typeface="Avenir Next"/>
-                <a:ea typeface="Hiragino Sans"/>
-                <a:cs typeface="Hiragino Sans"/>
-              </a:rPr>
-              <a:t>近似 2｜V_i ≈ 1.0 p.u.（正常時は 0.95〜1.05）</a:t>
-            </a:r>
-          </a:p>
-        </p:txBody>
-      </p:sp>
-      <p:sp>
-        <p:nvSpPr>
-          <p:cNvPr id="7" name="build:ghost"/>
-          <p:cNvSpPr txBox="1"/>
-          <p:nvPr/>
-        </p:nvSpPr>
-        <p:spPr>
-          <a:xfrm>
-            <a:off x="822960" y="3529139"/>
-            <a:ext cx="10801807" cy="385762"/>
-          </a:xfrm>
-          <a:prstGeom prst="rect">
-            <a:avLst/>
-          </a:prstGeom>
-          <a:noFill/>
-        </p:spPr>
-        <p:txBody>
-          <a:bodyPr wrap="square" lIns="0" rIns="0" tIns="0" bIns="0">
-            <a:noAutofit/>
-          </a:bodyPr>
-          <a:lstStyle/>
-          <a:p>
-            <a:pPr>
-              <a:lnSpc>
-                <a:spcPct val="130000"/>
-              </a:lnSpc>
-            </a:pPr>
-            <a:r>
-              <a:rPr sz="1500">
-                <a:solidFill>
-                  <a:srgbClr val="C1BCBB"/>
-                </a:solidFill>
-                <a:latin typeface="Avenir Next"/>
-                <a:ea typeface="Hiragino Sans"/>
-                <a:cs typeface="Hiragino Sans"/>
-              </a:rPr>
-              <a:t>電圧の積 V_i V_j が 1 になり、P_i = Σ_j B_ij sin θ_ij。</a:t>
-            </a:r>
-            <a:r>
-              <a:rPr sz="1500" b="1">
-                <a:solidFill>
-                  <a:srgbClr val="C1BCBB"/>
-                </a:solidFill>
-                <a:latin typeface="Avenir Next"/>
-                <a:ea typeface="Hiragino Sans"/>
-                <a:cs typeface="Hiragino Sans"/>
-              </a:rPr>
-              <a:t>未知数は θ だけ</a:t>
-            </a:r>
-            <a:r>
-              <a:rPr sz="1500">
-                <a:solidFill>
-                  <a:srgbClr val="C1BCBB"/>
-                </a:solidFill>
-                <a:latin typeface="Avenir Next"/>
-                <a:ea typeface="Hiragino Sans"/>
-                <a:cs typeface="Hiragino Sans"/>
-              </a:rPr>
-              <a:t>になる。</a:t>
-            </a:r>
-          </a:p>
-        </p:txBody>
-      </p:sp>
-      <p:sp>
-        <p:nvSpPr>
-          <p:cNvPr id="8" name="Rectangle 7"/>
-          <p:cNvSpPr/>
-          <p:nvPr/>
-        </p:nvSpPr>
-        <p:spPr>
-          <a:xfrm>
-            <a:off x="566928" y="4066793"/>
-            <a:ext cx="11057839" cy="9525"/>
-          </a:xfrm>
-          <a:prstGeom prst="rect">
-            <a:avLst/>
-          </a:prstGeom>
-          <a:solidFill>
-            <a:srgbClr val="E5DCCE"/>
-          </a:solidFill>
-          <a:ln>
-            <a:noFill/>
-          </a:ln>
-          <a:effectLst/>
-        </p:spPr>
-        <p:style>
-          <a:lnRef idx="1">
-            <a:schemeClr val="accent1"/>
-          </a:lnRef>
-          <a:fillRef idx="3">
-            <a:schemeClr val="accent1"/>
-          </a:fillRef>
-          <a:effectRef idx="2">
-            <a:schemeClr val="accent1"/>
-          </a:effectRef>
-          <a:fontRef idx="minor">
-            <a:schemeClr val="lt1"/>
-          </a:fontRef>
-        </p:style>
-        <p:txBody>
-          <a:bodyPr rtlCol="0" anchor="ctr"/>
-          <a:lstStyle/>
-          <a:p>
-            <a:pPr algn="ctr"/>
-          </a:p>
-        </p:txBody>
-      </p:sp>
-      <p:sp>
-        <p:nvSpPr>
-          <p:cNvPr id="9" name="build:ghost"/>
-          <p:cNvSpPr txBox="1"/>
-          <p:nvPr/>
-        </p:nvSpPr>
-        <p:spPr>
-          <a:xfrm>
-            <a:off x="566928" y="4244085"/>
-            <a:ext cx="11057839" cy="254000"/>
-          </a:xfrm>
-          <a:prstGeom prst="rect">
-            <a:avLst/>
-          </a:prstGeom>
-          <a:noFill/>
-        </p:spPr>
-        <p:txBody>
-          <a:bodyPr wrap="none" lIns="0" rIns="0" tIns="0" bIns="0">
-            <a:noAutofit/>
-          </a:bodyPr>
-          <a:lstStyle/>
-          <a:p>
-            <a:r>
-              <a:rPr sz="1600" b="1">
-                <a:solidFill>
-                  <a:srgbClr val="C1C9C5"/>
-                </a:solidFill>
-                <a:latin typeface="Avenir Next"/>
-                <a:ea typeface="Hiragino Sans"/>
-                <a:cs typeface="Hiragino Sans"/>
-              </a:rPr>
-              <a:t>近似 3｜sin θ_ij ≈ θ_ij（位相差が小さい、30° で誤差 4.7%）</a:t>
-            </a:r>
-          </a:p>
-        </p:txBody>
-      </p:sp>
-      <p:sp>
-        <p:nvSpPr>
-          <p:cNvPr id="10" name="build:ghost"/>
-          <p:cNvSpPr txBox="1"/>
-          <p:nvPr/>
-        </p:nvSpPr>
-        <p:spPr>
-          <a:xfrm>
-            <a:off x="822960" y="4536185"/>
-            <a:ext cx="10801807" cy="695325"/>
-          </a:xfrm>
-          <a:prstGeom prst="rect">
-            <a:avLst/>
-          </a:prstGeom>
-          <a:noFill/>
-        </p:spPr>
-        <p:txBody>
-          <a:bodyPr wrap="square" lIns="0" rIns="0" tIns="0" bIns="0">
-            <a:noAutofit/>
-          </a:bodyPr>
-          <a:lstStyle/>
-          <a:p>
-            <a:pPr>
-              <a:lnSpc>
-                <a:spcPct val="130000"/>
-              </a:lnSpc>
-            </a:pPr>
-            <a:r>
-              <a:rPr sz="1500">
-                <a:solidFill>
-                  <a:srgbClr val="C1BCBB"/>
-                </a:solidFill>
-                <a:latin typeface="Avenir Next"/>
-                <a:ea typeface="Hiragino Sans"/>
-                <a:cs typeface="Hiragino Sans"/>
-              </a:rPr>
-              <a:t>P_i = Σ_j (θ_i − θ_j)/x_ij、つまり </a:t>
-            </a:r>
-            <a:r>
-              <a:rPr sz="1500" b="1">
-                <a:solidFill>
-                  <a:srgbClr val="C1BCBB"/>
-                </a:solidFill>
-                <a:latin typeface="Avenir Next"/>
-                <a:ea typeface="Hiragino Sans"/>
-                <a:cs typeface="Hiragino Sans"/>
-              </a:rPr>
-              <a:t>P = B′θ</a:t>
-            </a:r>
-            <a:r>
-              <a:rPr sz="1500">
-                <a:solidFill>
-                  <a:srgbClr val="C1BCBB"/>
-                </a:solidFill>
-                <a:latin typeface="Avenir Next"/>
-                <a:ea typeface="Hiragino Sans"/>
-                <a:cs typeface="Hiragino Sans"/>
-              </a:rPr>
-              <a:t>（B′_ii = Σ 1/x_ij、B′_ij = −1/x_ij）。線形なので反復不要。直流回路の I = V/R と同じ形。</a:t>
-            </a:r>
-          </a:p>
-        </p:txBody>
-      </p:sp>
-      <p:sp>
-        <p:nvSpPr>
-          <p:cNvPr id="11" name="TextBox 10"/>
+            <a:r>
+              <a:rPr sz="1400">
+                <a:solidFill>
+                  <a:srgbClr val="71635B"/>
+                </a:solidFill>
+                <a:latin typeface="Avenir Next"/>
+                <a:ea typeface="Hiragino Sans"/>
+                <a:cs typeface="Hiragino Sans"/>
+              </a:rPr>
+              <a:t>架空送電線は X/R ≈ 5〜15（第3回）。Y_bus = jB となり、P_i = V_i Σ_j V_j B_ij sin θ_ij。cos の項（Q 側）が消える。　出典｜コード/fig_ch04.py</a:t>
+            </a:r>
+          </a:p>
+        </p:txBody>
+      </p:sp>
+      <p:sp>
+        <p:nvSpPr>
+          <p:cNvPr id="5" name="TextBox 4"/>
           <p:cNvSpPr txBox="1"/>
           <p:nvPr/>
         </p:nvSpPr>
@@ -19555,59 +17659,14 @@
       <p:grpSpPr/>
       <p:sp>
         <p:nvSpPr>
-          <p:cNvPr id="2" name="TextBox 1"/>
+          <p:cNvPr id="2" name="edge:title"/>
           <p:cNvSpPr txBox="1"/>
           <p:nvPr/>
         </p:nvSpPr>
         <p:spPr>
           <a:xfrm>
-            <a:off x="566928" y="457200"/>
-            <a:ext cx="11057839" cy="658368"/>
-          </a:xfrm>
-          <a:prstGeom prst="rect">
-            <a:avLst/>
-          </a:prstGeom>
-          <a:noFill/>
-        </p:spPr>
-        <p:txBody>
-          <a:bodyPr wrap="square" lIns="0" rIns="0" tIns="0" bIns="0" anchor="ctr">
-            <a:noAutofit/>
-          </a:bodyPr>
-          <a:lstStyle/>
-          <a:p>
-            <a:pPr>
-              <a:lnSpc>
-                <a:spcPct val="106000"/>
-              </a:lnSpc>
-              <a:defRPr sz="3390" b="1">
-                <a:solidFill>
-                  <a:srgbClr val="7C332A"/>
-                </a:solidFill>
-                <a:latin typeface="Avenir Next"/>
-                <a:ea typeface="Hiragino Sans"/>
-                <a:cs typeface="Hiragino Sans"/>
-              </a:defRPr>
-            </a:pPr>
-            <a:r>
-              <a:rPr>
-                <a:ea typeface="Hiragino Sans"/>
-                <a:cs typeface="Hiragino Sans"/>
-              </a:rPr>
-              <a:t>導出 — 3 つの近似で P = B′θ</a:t>
-            </a:r>
-          </a:p>
-        </p:txBody>
-      </p:sp>
-      <p:sp>
-        <p:nvSpPr>
-          <p:cNvPr id="3" name="TextBox 2"/>
-          <p:cNvSpPr txBox="1"/>
-          <p:nvPr/>
-        </p:nvSpPr>
-        <p:spPr>
-          <a:xfrm>
-            <a:off x="566928" y="2229993"/>
-            <a:ext cx="11057839" cy="254000"/>
+            <a:off x="566928" y="146304"/>
+            <a:ext cx="11057839" cy="457200"/>
           </a:xfrm>
           <a:prstGeom prst="rect">
             <a:avLst/>
@@ -19620,30 +17679,60 @@
           </a:bodyPr>
           <a:lstStyle/>
           <a:p>
-            <a:r>
-              <a:rPr sz="1600" b="1">
-                <a:solidFill>
-                  <a:srgbClr val="5C7268"/>
-                </a:solidFill>
-                <a:latin typeface="Avenir Next"/>
-                <a:ea typeface="Hiragino Sans"/>
-                <a:cs typeface="Hiragino Sans"/>
-              </a:rPr>
-              <a:t>近似 1｜R ≈ 0、対地アドミタンスも無視 → G = 0</a:t>
-            </a:r>
-          </a:p>
-        </p:txBody>
-      </p:sp>
-      <p:sp>
-        <p:nvSpPr>
-          <p:cNvPr id="4" name="TextBox 3"/>
+            <a:pPr>
+              <a:defRPr sz="2400" b="1">
+                <a:solidFill>
+                  <a:srgbClr val="7C332A"/>
+                </a:solidFill>
+                <a:latin typeface="Avenir Next"/>
+                <a:ea typeface="Hiragino Sans"/>
+                <a:cs typeface="Hiragino Sans"/>
+              </a:defRPr>
+            </a:pPr>
+            <a:r>
+              <a:rPr>
+                <a:ea typeface="Hiragino Sans"/>
+                <a:cs typeface="Hiragino Sans"/>
+              </a:rPr>
+              <a:t>導出 — 3 つの近似で P = B′θ</a:t>
+            </a:r>
+          </a:p>
+        </p:txBody>
+      </p:sp>
+      <p:pic>
+        <p:nvPicPr>
+          <p:cNvPr id="3" name="Picture 2" descr="ch04_deriv_dcpf_2.png"/>
+          <p:cNvPicPr>
+            <a:picLocks noChangeAspect="1"/>
+          </p:cNvPicPr>
+          <p:nvPr/>
+        </p:nvPicPr>
+        <p:blipFill>
+          <a:blip r:embed="rId2"/>
+          <a:stretch>
+            <a:fillRect/>
+          </a:stretch>
+        </p:blipFill>
+        <p:spPr>
+          <a:xfrm>
+            <a:off x="551856" y="713232"/>
+            <a:ext cx="11087983" cy="5532120"/>
+          </a:xfrm>
+          <a:prstGeom prst="rect">
+            <a:avLst/>
+          </a:prstGeom>
+        </p:spPr>
+      </p:pic>
+      <p:sp>
+        <p:nvSpPr>
+          <p:cNvPr id="4" name="edge:caption"/>
           <p:cNvSpPr txBox="1"/>
           <p:nvPr/>
         </p:nvSpPr>
         <p:spPr>
           <a:xfrm>
-            <a:off x="822960" y="2522093"/>
-            <a:ext cx="10801807" cy="385762"/>
+            <a:off x="228600" y="6300216"/>
+            <a:ext cx="11734495" cy="310896"/>
           </a:xfrm>
           <a:prstGeom prst="rect">
             <a:avLst/>
@@ -19656,336 +17745,24 @@
           </a:bodyPr>
           <a:lstStyle/>
           <a:p>
-            <a:pPr>
-              <a:lnSpc>
-                <a:spcPct val="130000"/>
-              </a:lnSpc>
-            </a:pPr>
-            <a:r>
-              <a:rPr sz="1500">
-                <a:solidFill>
-                  <a:srgbClr val="33221E"/>
-                </a:solidFill>
-                <a:latin typeface="Avenir Next"/>
-                <a:ea typeface="Hiragino Sans"/>
-                <a:cs typeface="Hiragino Sans"/>
-              </a:rPr>
-              <a:t>架空送電線は X/R ≈ 5〜15（第3回）。Y_bus = jB となり、P_i = V_i Σ_j V_j B_ij sin θ_ij。</a:t>
-            </a:r>
-            <a:r>
-              <a:rPr sz="1500" b="1">
-                <a:solidFill>
-                  <a:srgbClr val="33221E"/>
-                </a:solidFill>
-                <a:latin typeface="Avenir Next"/>
-                <a:ea typeface="Hiragino Sans"/>
-                <a:cs typeface="Hiragino Sans"/>
-              </a:rPr>
-              <a:t>cos の項（Q 側）が消える</a:t>
-            </a:r>
-            <a:r>
-              <a:rPr sz="1500">
-                <a:solidFill>
-                  <a:srgbClr val="33221E"/>
-                </a:solidFill>
-                <a:latin typeface="Avenir Next"/>
-                <a:ea typeface="Hiragino Sans"/>
-                <a:cs typeface="Hiragino Sans"/>
-              </a:rPr>
-              <a:t>。</a:t>
-            </a:r>
-          </a:p>
-        </p:txBody>
-      </p:sp>
-      <p:sp>
-        <p:nvSpPr>
-          <p:cNvPr id="5" name="Rectangle 4"/>
-          <p:cNvSpPr/>
-          <p:nvPr/>
-        </p:nvSpPr>
-        <p:spPr>
-          <a:xfrm>
-            <a:off x="566928" y="3059747"/>
-            <a:ext cx="11057839" cy="9525"/>
-          </a:xfrm>
-          <a:prstGeom prst="rect">
-            <a:avLst/>
-          </a:prstGeom>
-          <a:solidFill>
-            <a:srgbClr val="E5DCCE"/>
-          </a:solidFill>
-          <a:ln>
-            <a:noFill/>
-          </a:ln>
-          <a:effectLst/>
-        </p:spPr>
-        <p:style>
-          <a:lnRef idx="1">
-            <a:schemeClr val="accent1"/>
-          </a:lnRef>
-          <a:fillRef idx="3">
-            <a:schemeClr val="accent1"/>
-          </a:fillRef>
-          <a:effectRef idx="2">
-            <a:schemeClr val="accent1"/>
-          </a:effectRef>
-          <a:fontRef idx="minor">
-            <a:schemeClr val="lt1"/>
-          </a:fontRef>
-        </p:style>
-        <p:txBody>
-          <a:bodyPr rtlCol="0" anchor="ctr"/>
-          <a:lstStyle/>
-          <a:p>
             <a:pPr algn="ctr"/>
-          </a:p>
-        </p:txBody>
-      </p:sp>
-      <p:sp>
-        <p:nvSpPr>
-          <p:cNvPr id="6" name="TextBox 5"/>
-          <p:cNvSpPr txBox="1"/>
-          <p:nvPr/>
-        </p:nvSpPr>
-        <p:spPr>
-          <a:xfrm>
-            <a:off x="566928" y="3237039"/>
-            <a:ext cx="11057839" cy="254000"/>
-          </a:xfrm>
-          <a:prstGeom prst="rect">
-            <a:avLst/>
-          </a:prstGeom>
-          <a:noFill/>
-        </p:spPr>
-        <p:txBody>
-          <a:bodyPr wrap="none" lIns="0" rIns="0" tIns="0" bIns="0">
-            <a:noAutofit/>
-          </a:bodyPr>
-          <a:lstStyle/>
-          <a:p>
-            <a:r>
-              <a:rPr sz="1600" b="1">
-                <a:solidFill>
-                  <a:srgbClr val="5C7268"/>
-                </a:solidFill>
-                <a:latin typeface="Avenir Next"/>
-                <a:ea typeface="Hiragino Sans"/>
-                <a:cs typeface="Hiragino Sans"/>
-              </a:rPr>
-              <a:t>近似 2｜V_i ≈ 1.0 p.u.（正常時は 0.95〜1.05）</a:t>
-            </a:r>
-          </a:p>
-        </p:txBody>
-      </p:sp>
-      <p:sp>
-        <p:nvSpPr>
-          <p:cNvPr id="7" name="TextBox 6"/>
-          <p:cNvSpPr txBox="1"/>
-          <p:nvPr/>
-        </p:nvSpPr>
-        <p:spPr>
-          <a:xfrm>
-            <a:off x="822960" y="3529139"/>
-            <a:ext cx="10801807" cy="385762"/>
-          </a:xfrm>
-          <a:prstGeom prst="rect">
-            <a:avLst/>
-          </a:prstGeom>
-          <a:noFill/>
-        </p:spPr>
-        <p:txBody>
-          <a:bodyPr wrap="square" lIns="0" rIns="0" tIns="0" bIns="0">
-            <a:noAutofit/>
-          </a:bodyPr>
-          <a:lstStyle/>
-          <a:p>
-            <a:pPr>
-              <a:lnSpc>
-                <a:spcPct val="130000"/>
-              </a:lnSpc>
-            </a:pPr>
-            <a:r>
-              <a:rPr sz="1500">
-                <a:solidFill>
-                  <a:srgbClr val="33221E"/>
-                </a:solidFill>
-                <a:latin typeface="Avenir Next"/>
-                <a:ea typeface="Hiragino Sans"/>
-                <a:cs typeface="Hiragino Sans"/>
-              </a:rPr>
-              <a:t>電圧の積 V_i V_j が 1 になり、P_i = Σ_j B_ij sin θ_ij。</a:t>
-            </a:r>
-            <a:r>
-              <a:rPr sz="1500" b="1">
-                <a:solidFill>
-                  <a:srgbClr val="33221E"/>
-                </a:solidFill>
-                <a:latin typeface="Avenir Next"/>
-                <a:ea typeface="Hiragino Sans"/>
-                <a:cs typeface="Hiragino Sans"/>
-              </a:rPr>
-              <a:t>未知数は θ だけ</a:t>
-            </a:r>
-            <a:r>
-              <a:rPr sz="1500">
-                <a:solidFill>
-                  <a:srgbClr val="33221E"/>
-                </a:solidFill>
-                <a:latin typeface="Avenir Next"/>
-                <a:ea typeface="Hiragino Sans"/>
-                <a:cs typeface="Hiragino Sans"/>
-              </a:rPr>
-              <a:t>になる。</a:t>
-            </a:r>
-          </a:p>
-        </p:txBody>
-      </p:sp>
-      <p:sp>
-        <p:nvSpPr>
-          <p:cNvPr id="8" name="Rectangle 7"/>
-          <p:cNvSpPr/>
-          <p:nvPr/>
-        </p:nvSpPr>
-        <p:spPr>
-          <a:xfrm>
-            <a:off x="566928" y="4066793"/>
-            <a:ext cx="11057839" cy="9525"/>
-          </a:xfrm>
-          <a:prstGeom prst="rect">
-            <a:avLst/>
-          </a:prstGeom>
-          <a:solidFill>
-            <a:srgbClr val="E5DCCE"/>
-          </a:solidFill>
-          <a:ln>
-            <a:noFill/>
-          </a:ln>
-          <a:effectLst/>
-        </p:spPr>
-        <p:style>
-          <a:lnRef idx="1">
-            <a:schemeClr val="accent1"/>
-          </a:lnRef>
-          <a:fillRef idx="3">
-            <a:schemeClr val="accent1"/>
-          </a:fillRef>
-          <a:effectRef idx="2">
-            <a:schemeClr val="accent1"/>
-          </a:effectRef>
-          <a:fontRef idx="minor">
-            <a:schemeClr val="lt1"/>
-          </a:fontRef>
-        </p:style>
-        <p:txBody>
-          <a:bodyPr rtlCol="0" anchor="ctr"/>
-          <a:lstStyle/>
-          <a:p>
-            <a:pPr algn="ctr"/>
-          </a:p>
-        </p:txBody>
-      </p:sp>
-      <p:sp>
-        <p:nvSpPr>
-          <p:cNvPr id="9" name="build:ghost"/>
-          <p:cNvSpPr txBox="1"/>
-          <p:nvPr/>
-        </p:nvSpPr>
-        <p:spPr>
-          <a:xfrm>
-            <a:off x="566928" y="4244085"/>
-            <a:ext cx="11057839" cy="254000"/>
-          </a:xfrm>
-          <a:prstGeom prst="rect">
-            <a:avLst/>
-          </a:prstGeom>
-          <a:noFill/>
-        </p:spPr>
-        <p:txBody>
-          <a:bodyPr wrap="none" lIns="0" rIns="0" tIns="0" bIns="0">
-            <a:noAutofit/>
-          </a:bodyPr>
-          <a:lstStyle/>
-          <a:p>
-            <a:r>
-              <a:rPr sz="1600" b="1">
-                <a:solidFill>
-                  <a:srgbClr val="C1C9C5"/>
-                </a:solidFill>
-                <a:latin typeface="Avenir Next"/>
-                <a:ea typeface="Hiragino Sans"/>
-                <a:cs typeface="Hiragino Sans"/>
-              </a:rPr>
-              <a:t>近似 3｜sin θ_ij ≈ θ_ij（位相差が小さい、30° で誤差 4.7%）</a:t>
-            </a:r>
-          </a:p>
-        </p:txBody>
-      </p:sp>
-      <p:sp>
-        <p:nvSpPr>
-          <p:cNvPr id="10" name="build:ghost"/>
-          <p:cNvSpPr txBox="1"/>
-          <p:nvPr/>
-        </p:nvSpPr>
-        <p:spPr>
-          <a:xfrm>
-            <a:off x="822960" y="4536185"/>
-            <a:ext cx="10801807" cy="695325"/>
-          </a:xfrm>
-          <a:prstGeom prst="rect">
-            <a:avLst/>
-          </a:prstGeom>
-          <a:noFill/>
-        </p:spPr>
-        <p:txBody>
-          <a:bodyPr wrap="square" lIns="0" rIns="0" tIns="0" bIns="0">
-            <a:noAutofit/>
-          </a:bodyPr>
-          <a:lstStyle/>
-          <a:p>
-            <a:pPr>
-              <a:lnSpc>
-                <a:spcPct val="130000"/>
-              </a:lnSpc>
-            </a:pPr>
-            <a:r>
-              <a:rPr sz="1500">
-                <a:solidFill>
-                  <a:srgbClr val="C1BCBB"/>
-                </a:solidFill>
-                <a:latin typeface="Avenir Next"/>
-                <a:ea typeface="Hiragino Sans"/>
-                <a:cs typeface="Hiragino Sans"/>
-              </a:rPr>
-              <a:t>P_i = Σ_j (θ_i − θ_j)/x_ij、つまり </a:t>
-            </a:r>
-            <a:r>
-              <a:rPr sz="1500" b="1">
-                <a:solidFill>
-                  <a:srgbClr val="C1BCBB"/>
-                </a:solidFill>
-                <a:latin typeface="Avenir Next"/>
-                <a:ea typeface="Hiragino Sans"/>
-                <a:cs typeface="Hiragino Sans"/>
-              </a:rPr>
-              <a:t>P = B′θ</a:t>
-            </a:r>
-            <a:r>
-              <a:rPr sz="1500">
-                <a:solidFill>
-                  <a:srgbClr val="C1BCBB"/>
-                </a:solidFill>
-                <a:latin typeface="Avenir Next"/>
-                <a:ea typeface="Hiragino Sans"/>
-                <a:cs typeface="Hiragino Sans"/>
-              </a:rPr>
-              <a:t>（B′_ii = Σ 1/x_ij、B′_ij = −1/x_ij）。線形なので反復不要。直流回路の I = V/R と同じ形。</a:t>
-            </a:r>
-          </a:p>
-        </p:txBody>
-      </p:sp>
-      <p:sp>
-        <p:nvSpPr>
-          <p:cNvPr id="11" name="TextBox 10"/>
+            <a:r>
+              <a:rPr sz="1400">
+                <a:solidFill>
+                  <a:srgbClr val="71635B"/>
+                </a:solidFill>
+                <a:latin typeface="Avenir Next"/>
+                <a:ea typeface="Hiragino Sans"/>
+                <a:cs typeface="Hiragino Sans"/>
+              </a:rPr>
+              <a:t>電圧の積 V_i V_j が 1 になり、P_i = Σ_j B_ij sin θ_ij。未知数は θ だけになる。　出典｜コード/fig_ch04.py</a:t>
+            </a:r>
+          </a:p>
+        </p:txBody>
+      </p:sp>
+      <p:sp>
+        <p:nvSpPr>
+          <p:cNvPr id="5" name="TextBox 4"/>
           <p:cNvSpPr txBox="1"/>
           <p:nvPr/>
         </p:nvSpPr>
@@ -20041,59 +17818,14 @@
       <p:grpSpPr/>
       <p:sp>
         <p:nvSpPr>
-          <p:cNvPr id="2" name="TextBox 1"/>
+          <p:cNvPr id="2" name="edge:title"/>
           <p:cNvSpPr txBox="1"/>
           <p:nvPr/>
         </p:nvSpPr>
         <p:spPr>
           <a:xfrm>
-            <a:off x="566928" y="457200"/>
-            <a:ext cx="11057839" cy="658368"/>
-          </a:xfrm>
-          <a:prstGeom prst="rect">
-            <a:avLst/>
-          </a:prstGeom>
-          <a:noFill/>
-        </p:spPr>
-        <p:txBody>
-          <a:bodyPr wrap="square" lIns="0" rIns="0" tIns="0" bIns="0" anchor="ctr">
-            <a:noAutofit/>
-          </a:bodyPr>
-          <a:lstStyle/>
-          <a:p>
-            <a:pPr>
-              <a:lnSpc>
-                <a:spcPct val="106000"/>
-              </a:lnSpc>
-              <a:defRPr sz="3390" b="1">
-                <a:solidFill>
-                  <a:srgbClr val="7C332A"/>
-                </a:solidFill>
-                <a:latin typeface="Avenir Next"/>
-                <a:ea typeface="Hiragino Sans"/>
-                <a:cs typeface="Hiragino Sans"/>
-              </a:defRPr>
-            </a:pPr>
-            <a:r>
-              <a:rPr>
-                <a:ea typeface="Hiragino Sans"/>
-                <a:cs typeface="Hiragino Sans"/>
-              </a:rPr>
-              <a:t>導出 — 3 つの近似で P = B′θ</a:t>
-            </a:r>
-          </a:p>
-        </p:txBody>
-      </p:sp>
-      <p:sp>
-        <p:nvSpPr>
-          <p:cNvPr id="3" name="TextBox 2"/>
-          <p:cNvSpPr txBox="1"/>
-          <p:nvPr/>
-        </p:nvSpPr>
-        <p:spPr>
-          <a:xfrm>
-            <a:off x="566928" y="2229993"/>
-            <a:ext cx="11057839" cy="254000"/>
+            <a:off x="566928" y="146304"/>
+            <a:ext cx="11057839" cy="457200"/>
           </a:xfrm>
           <a:prstGeom prst="rect">
             <a:avLst/>
@@ -20106,30 +17838,60 @@
           </a:bodyPr>
           <a:lstStyle/>
           <a:p>
-            <a:r>
-              <a:rPr sz="1600" b="1">
-                <a:solidFill>
-                  <a:srgbClr val="5C7268"/>
-                </a:solidFill>
-                <a:latin typeface="Avenir Next"/>
-                <a:ea typeface="Hiragino Sans"/>
-                <a:cs typeface="Hiragino Sans"/>
-              </a:rPr>
-              <a:t>近似 1｜R ≈ 0、対地アドミタンスも無視 → G = 0</a:t>
-            </a:r>
-          </a:p>
-        </p:txBody>
-      </p:sp>
-      <p:sp>
-        <p:nvSpPr>
-          <p:cNvPr id="4" name="TextBox 3"/>
+            <a:pPr>
+              <a:defRPr sz="2400" b="1">
+                <a:solidFill>
+                  <a:srgbClr val="7C332A"/>
+                </a:solidFill>
+                <a:latin typeface="Avenir Next"/>
+                <a:ea typeface="Hiragino Sans"/>
+                <a:cs typeface="Hiragino Sans"/>
+              </a:defRPr>
+            </a:pPr>
+            <a:r>
+              <a:rPr>
+                <a:ea typeface="Hiragino Sans"/>
+                <a:cs typeface="Hiragino Sans"/>
+              </a:rPr>
+              <a:t>導出 — 3 つの近似で P = B′θ</a:t>
+            </a:r>
+          </a:p>
+        </p:txBody>
+      </p:sp>
+      <p:pic>
+        <p:nvPicPr>
+          <p:cNvPr id="3" name="Picture 2" descr="ch04_deriv_dcpf_3.png"/>
+          <p:cNvPicPr>
+            <a:picLocks noChangeAspect="1"/>
+          </p:cNvPicPr>
+          <p:nvPr/>
+        </p:nvPicPr>
+        <p:blipFill>
+          <a:blip r:embed="rId2"/>
+          <a:stretch>
+            <a:fillRect/>
+          </a:stretch>
+        </p:blipFill>
+        <p:spPr>
+          <a:xfrm>
+            <a:off x="762110" y="713232"/>
+            <a:ext cx="10667474" cy="5322316"/>
+          </a:xfrm>
+          <a:prstGeom prst="rect">
+            <a:avLst/>
+          </a:prstGeom>
+        </p:spPr>
+      </p:pic>
+      <p:sp>
+        <p:nvSpPr>
+          <p:cNvPr id="4" name="edge:caption"/>
           <p:cNvSpPr txBox="1"/>
           <p:nvPr/>
         </p:nvSpPr>
         <p:spPr>
           <a:xfrm>
-            <a:off x="822960" y="2522093"/>
-            <a:ext cx="10801807" cy="385762"/>
+            <a:off x="228600" y="6090412"/>
+            <a:ext cx="11734495" cy="520700"/>
           </a:xfrm>
           <a:prstGeom prst="rect">
             <a:avLst/>
@@ -20142,336 +17904,24 @@
           </a:bodyPr>
           <a:lstStyle/>
           <a:p>
-            <a:pPr>
-              <a:lnSpc>
-                <a:spcPct val="130000"/>
-              </a:lnSpc>
-            </a:pPr>
-            <a:r>
-              <a:rPr sz="1500">
-                <a:solidFill>
-                  <a:srgbClr val="33221E"/>
-                </a:solidFill>
-                <a:latin typeface="Avenir Next"/>
-                <a:ea typeface="Hiragino Sans"/>
-                <a:cs typeface="Hiragino Sans"/>
-              </a:rPr>
-              <a:t>架空送電線は X/R ≈ 5〜15（第3回）。Y_bus = jB となり、P_i = V_i Σ_j V_j B_ij sin θ_ij。</a:t>
-            </a:r>
-            <a:r>
-              <a:rPr sz="1500" b="1">
-                <a:solidFill>
-                  <a:srgbClr val="33221E"/>
-                </a:solidFill>
-                <a:latin typeface="Avenir Next"/>
-                <a:ea typeface="Hiragino Sans"/>
-                <a:cs typeface="Hiragino Sans"/>
-              </a:rPr>
-              <a:t>cos の項（Q 側）が消える</a:t>
-            </a:r>
-            <a:r>
-              <a:rPr sz="1500">
-                <a:solidFill>
-                  <a:srgbClr val="33221E"/>
-                </a:solidFill>
-                <a:latin typeface="Avenir Next"/>
-                <a:ea typeface="Hiragino Sans"/>
-                <a:cs typeface="Hiragino Sans"/>
-              </a:rPr>
-              <a:t>。</a:t>
-            </a:r>
-          </a:p>
-        </p:txBody>
-      </p:sp>
-      <p:sp>
-        <p:nvSpPr>
-          <p:cNvPr id="5" name="Rectangle 4"/>
-          <p:cNvSpPr/>
-          <p:nvPr/>
-        </p:nvSpPr>
-        <p:spPr>
-          <a:xfrm>
-            <a:off x="566928" y="3059747"/>
-            <a:ext cx="11057839" cy="9525"/>
-          </a:xfrm>
-          <a:prstGeom prst="rect">
-            <a:avLst/>
-          </a:prstGeom>
-          <a:solidFill>
-            <a:srgbClr val="E5DCCE"/>
-          </a:solidFill>
-          <a:ln>
-            <a:noFill/>
-          </a:ln>
-          <a:effectLst/>
-        </p:spPr>
-        <p:style>
-          <a:lnRef idx="1">
-            <a:schemeClr val="accent1"/>
-          </a:lnRef>
-          <a:fillRef idx="3">
-            <a:schemeClr val="accent1"/>
-          </a:fillRef>
-          <a:effectRef idx="2">
-            <a:schemeClr val="accent1"/>
-          </a:effectRef>
-          <a:fontRef idx="minor">
-            <a:schemeClr val="lt1"/>
-          </a:fontRef>
-        </p:style>
-        <p:txBody>
-          <a:bodyPr rtlCol="0" anchor="ctr"/>
-          <a:lstStyle/>
-          <a:p>
             <a:pPr algn="ctr"/>
-          </a:p>
-        </p:txBody>
-      </p:sp>
-      <p:sp>
-        <p:nvSpPr>
-          <p:cNvPr id="6" name="TextBox 5"/>
-          <p:cNvSpPr txBox="1"/>
-          <p:nvPr/>
-        </p:nvSpPr>
-        <p:spPr>
-          <a:xfrm>
-            <a:off x="566928" y="3237039"/>
-            <a:ext cx="11057839" cy="254000"/>
-          </a:xfrm>
-          <a:prstGeom prst="rect">
-            <a:avLst/>
-          </a:prstGeom>
-          <a:noFill/>
-        </p:spPr>
-        <p:txBody>
-          <a:bodyPr wrap="none" lIns="0" rIns="0" tIns="0" bIns="0">
-            <a:noAutofit/>
-          </a:bodyPr>
-          <a:lstStyle/>
-          <a:p>
-            <a:r>
-              <a:rPr sz="1600" b="1">
-                <a:solidFill>
-                  <a:srgbClr val="5C7268"/>
-                </a:solidFill>
-                <a:latin typeface="Avenir Next"/>
-                <a:ea typeface="Hiragino Sans"/>
-                <a:cs typeface="Hiragino Sans"/>
-              </a:rPr>
-              <a:t>近似 2｜V_i ≈ 1.0 p.u.（正常時は 0.95〜1.05）</a:t>
-            </a:r>
-          </a:p>
-        </p:txBody>
-      </p:sp>
-      <p:sp>
-        <p:nvSpPr>
-          <p:cNvPr id="7" name="TextBox 6"/>
-          <p:cNvSpPr txBox="1"/>
-          <p:nvPr/>
-        </p:nvSpPr>
-        <p:spPr>
-          <a:xfrm>
-            <a:off x="822960" y="3529139"/>
-            <a:ext cx="10801807" cy="385762"/>
-          </a:xfrm>
-          <a:prstGeom prst="rect">
-            <a:avLst/>
-          </a:prstGeom>
-          <a:noFill/>
-        </p:spPr>
-        <p:txBody>
-          <a:bodyPr wrap="square" lIns="0" rIns="0" tIns="0" bIns="0">
-            <a:noAutofit/>
-          </a:bodyPr>
-          <a:lstStyle/>
-          <a:p>
-            <a:pPr>
-              <a:lnSpc>
-                <a:spcPct val="130000"/>
-              </a:lnSpc>
-            </a:pPr>
-            <a:r>
-              <a:rPr sz="1500">
-                <a:solidFill>
-                  <a:srgbClr val="33221E"/>
-                </a:solidFill>
-                <a:latin typeface="Avenir Next"/>
-                <a:ea typeface="Hiragino Sans"/>
-                <a:cs typeface="Hiragino Sans"/>
-              </a:rPr>
-              <a:t>電圧の積 V_i V_j が 1 になり、P_i = Σ_j B_ij sin θ_ij。</a:t>
-            </a:r>
-            <a:r>
-              <a:rPr sz="1500" b="1">
-                <a:solidFill>
-                  <a:srgbClr val="33221E"/>
-                </a:solidFill>
-                <a:latin typeface="Avenir Next"/>
-                <a:ea typeface="Hiragino Sans"/>
-                <a:cs typeface="Hiragino Sans"/>
-              </a:rPr>
-              <a:t>未知数は θ だけ</a:t>
-            </a:r>
-            <a:r>
-              <a:rPr sz="1500">
-                <a:solidFill>
-                  <a:srgbClr val="33221E"/>
-                </a:solidFill>
-                <a:latin typeface="Avenir Next"/>
-                <a:ea typeface="Hiragino Sans"/>
-                <a:cs typeface="Hiragino Sans"/>
-              </a:rPr>
-              <a:t>になる。</a:t>
-            </a:r>
-          </a:p>
-        </p:txBody>
-      </p:sp>
-      <p:sp>
-        <p:nvSpPr>
-          <p:cNvPr id="8" name="Rectangle 7"/>
-          <p:cNvSpPr/>
-          <p:nvPr/>
-        </p:nvSpPr>
-        <p:spPr>
-          <a:xfrm>
-            <a:off x="566928" y="4066793"/>
-            <a:ext cx="11057839" cy="9525"/>
-          </a:xfrm>
-          <a:prstGeom prst="rect">
-            <a:avLst/>
-          </a:prstGeom>
-          <a:solidFill>
-            <a:srgbClr val="E5DCCE"/>
-          </a:solidFill>
-          <a:ln>
-            <a:noFill/>
-          </a:ln>
-          <a:effectLst/>
-        </p:spPr>
-        <p:style>
-          <a:lnRef idx="1">
-            <a:schemeClr val="accent1"/>
-          </a:lnRef>
-          <a:fillRef idx="3">
-            <a:schemeClr val="accent1"/>
-          </a:fillRef>
-          <a:effectRef idx="2">
-            <a:schemeClr val="accent1"/>
-          </a:effectRef>
-          <a:fontRef idx="minor">
-            <a:schemeClr val="lt1"/>
-          </a:fontRef>
-        </p:style>
-        <p:txBody>
-          <a:bodyPr rtlCol="0" anchor="ctr"/>
-          <a:lstStyle/>
-          <a:p>
-            <a:pPr algn="ctr"/>
-          </a:p>
-        </p:txBody>
-      </p:sp>
-      <p:sp>
-        <p:nvSpPr>
-          <p:cNvPr id="9" name="TextBox 8"/>
-          <p:cNvSpPr txBox="1"/>
-          <p:nvPr/>
-        </p:nvSpPr>
-        <p:spPr>
-          <a:xfrm>
-            <a:off x="566928" y="4244085"/>
-            <a:ext cx="11057839" cy="254000"/>
-          </a:xfrm>
-          <a:prstGeom prst="rect">
-            <a:avLst/>
-          </a:prstGeom>
-          <a:noFill/>
-        </p:spPr>
-        <p:txBody>
-          <a:bodyPr wrap="none" lIns="0" rIns="0" tIns="0" bIns="0">
-            <a:noAutofit/>
-          </a:bodyPr>
-          <a:lstStyle/>
-          <a:p>
-            <a:r>
-              <a:rPr sz="1600" b="1">
-                <a:solidFill>
-                  <a:srgbClr val="5C7268"/>
-                </a:solidFill>
-                <a:latin typeface="Avenir Next"/>
-                <a:ea typeface="Hiragino Sans"/>
-                <a:cs typeface="Hiragino Sans"/>
-              </a:rPr>
-              <a:t>近似 3｜sin θ_ij ≈ θ_ij（位相差が小さい、30° で誤差 4.7%）</a:t>
-            </a:r>
-          </a:p>
-        </p:txBody>
-      </p:sp>
-      <p:sp>
-        <p:nvSpPr>
-          <p:cNvPr id="10" name="TextBox 9"/>
-          <p:cNvSpPr txBox="1"/>
-          <p:nvPr/>
-        </p:nvSpPr>
-        <p:spPr>
-          <a:xfrm>
-            <a:off x="822960" y="4536185"/>
-            <a:ext cx="10801807" cy="695325"/>
-          </a:xfrm>
-          <a:prstGeom prst="rect">
-            <a:avLst/>
-          </a:prstGeom>
-          <a:noFill/>
-        </p:spPr>
-        <p:txBody>
-          <a:bodyPr wrap="square" lIns="0" rIns="0" tIns="0" bIns="0">
-            <a:noAutofit/>
-          </a:bodyPr>
-          <a:lstStyle/>
-          <a:p>
-            <a:pPr>
-              <a:lnSpc>
-                <a:spcPct val="130000"/>
-              </a:lnSpc>
-            </a:pPr>
-            <a:r>
-              <a:rPr sz="1500">
-                <a:solidFill>
-                  <a:srgbClr val="33221E"/>
-                </a:solidFill>
-                <a:latin typeface="Avenir Next"/>
-                <a:ea typeface="Hiragino Sans"/>
-                <a:cs typeface="Hiragino Sans"/>
-              </a:rPr>
-              <a:t>P_i = Σ_j (θ_i − θ_j)/x_ij、つまり </a:t>
-            </a:r>
-            <a:r>
-              <a:rPr sz="1500" b="1">
-                <a:solidFill>
-                  <a:srgbClr val="33221E"/>
-                </a:solidFill>
-                <a:latin typeface="Avenir Next"/>
-                <a:ea typeface="Hiragino Sans"/>
-                <a:cs typeface="Hiragino Sans"/>
-              </a:rPr>
-              <a:t>P = B′θ</a:t>
-            </a:r>
-            <a:r>
-              <a:rPr sz="1500">
-                <a:solidFill>
-                  <a:srgbClr val="33221E"/>
-                </a:solidFill>
-                <a:latin typeface="Avenir Next"/>
-                <a:ea typeface="Hiragino Sans"/>
-                <a:cs typeface="Hiragino Sans"/>
-              </a:rPr>
-              <a:t>（B′_ii = Σ 1/x_ij、B′_ij = −1/x_ij）。線形なので反復不要。直流回路の I = V/R と同じ形。</a:t>
-            </a:r>
-          </a:p>
-        </p:txBody>
-      </p:sp>
-      <p:sp>
-        <p:nvSpPr>
-          <p:cNvPr id="11" name="TextBox 10"/>
+            <a:r>
+              <a:rPr sz="1400">
+                <a:solidFill>
+                  <a:srgbClr val="71635B"/>
+                </a:solidFill>
+                <a:latin typeface="Avenir Next"/>
+                <a:ea typeface="Hiragino Sans"/>
+                <a:cs typeface="Hiragino Sans"/>
+              </a:rPr>
+              <a:t>P_i = Σ_j (θ_i − θ_j)/x_ij、つまり P = B′θ（B′_ii = Σ 1/x_ij、B′_ij = −1/x_ij）。線形なので反復不要。直流回路の I = V/R と同じ形。　出典｜コード/fig_ch04.py</a:t>
+            </a:r>
+          </a:p>
+        </p:txBody>
+      </p:sp>
+      <p:sp>
+        <p:nvSpPr>
+          <p:cNvPr id="5" name="TextBox 4"/>
           <p:cNvSpPr txBox="1"/>
           <p:nvPr/>
         </p:nvSpPr>
@@ -25707,59 +23157,14 @@
       <p:grpSpPr/>
       <p:sp>
         <p:nvSpPr>
-          <p:cNvPr id="2" name="TextBox 1"/>
+          <p:cNvPr id="2" name="edge:title"/>
           <p:cNvSpPr txBox="1"/>
           <p:nvPr/>
         </p:nvSpPr>
         <p:spPr>
           <a:xfrm>
-            <a:off x="566928" y="457200"/>
-            <a:ext cx="11057839" cy="658368"/>
-          </a:xfrm>
-          <a:prstGeom prst="rect">
-            <a:avLst/>
-          </a:prstGeom>
-          <a:noFill/>
-        </p:spPr>
-        <p:txBody>
-          <a:bodyPr wrap="square" lIns="0" rIns="0" tIns="0" bIns="0" anchor="ctr">
-            <a:noAutofit/>
-          </a:bodyPr>
-          <a:lstStyle/>
-          <a:p>
-            <a:pPr>
-              <a:lnSpc>
-                <a:spcPct val="106000"/>
-              </a:lnSpc>
-              <a:defRPr sz="3390" b="1">
-                <a:solidFill>
-                  <a:srgbClr val="7C332A"/>
-                </a:solidFill>
-                <a:latin typeface="Avenir Next"/>
-                <a:ea typeface="Hiragino Sans"/>
-                <a:cs typeface="Hiragino Sans"/>
-              </a:defRPr>
-            </a:pPr>
-            <a:r>
-              <a:rPr>
-                <a:ea typeface="Hiragino Sans"/>
-                <a:cs typeface="Hiragino Sans"/>
-              </a:rPr>
-              <a:t>導出 — キルヒホッフの電流則から I = Y_bus V</a:t>
-            </a:r>
-          </a:p>
-        </p:txBody>
-      </p:sp>
-      <p:sp>
-        <p:nvSpPr>
-          <p:cNvPr id="3" name="TextBox 2"/>
-          <p:cNvSpPr txBox="1"/>
-          <p:nvPr/>
-        </p:nvSpPr>
-        <p:spPr>
-          <a:xfrm>
-            <a:off x="566928" y="2229993"/>
-            <a:ext cx="11057839" cy="254000"/>
+            <a:off x="566928" y="146304"/>
+            <a:ext cx="11057839" cy="457200"/>
           </a:xfrm>
           <a:prstGeom prst="rect">
             <a:avLst/>
@@ -25772,30 +23177,60 @@
           </a:bodyPr>
           <a:lstStyle/>
           <a:p>
-            <a:r>
-              <a:rPr sz="1600" b="1">
-                <a:solidFill>
-                  <a:srgbClr val="5C7268"/>
-                </a:solidFill>
-                <a:latin typeface="Avenir Next"/>
-                <a:ea typeface="Hiragino Sans"/>
-                <a:cs typeface="Hiragino Sans"/>
-              </a:rPr>
-              <a:t>① 線路の電流｜母線 i から j へ I_ij = y_ij (V_i − V_j)</a:t>
-            </a:r>
-          </a:p>
-        </p:txBody>
-      </p:sp>
-      <p:sp>
-        <p:nvSpPr>
-          <p:cNvPr id="4" name="TextBox 3"/>
+            <a:pPr>
+              <a:defRPr sz="2400" b="1">
+                <a:solidFill>
+                  <a:srgbClr val="7C332A"/>
+                </a:solidFill>
+                <a:latin typeface="Avenir Next"/>
+                <a:ea typeface="Hiragino Sans"/>
+                <a:cs typeface="Hiragino Sans"/>
+              </a:defRPr>
+            </a:pPr>
+            <a:r>
+              <a:rPr>
+                <a:ea typeface="Hiragino Sans"/>
+                <a:cs typeface="Hiragino Sans"/>
+              </a:rPr>
+              <a:t>導出 — キルヒホッフの電流則から I = Y_bus V</a:t>
+            </a:r>
+          </a:p>
+        </p:txBody>
+      </p:sp>
+      <p:pic>
+        <p:nvPicPr>
+          <p:cNvPr id="3" name="Picture 2" descr="ch04_deriv_ybus_1.png"/>
+          <p:cNvPicPr>
+            <a:picLocks noChangeAspect="1"/>
+          </p:cNvPicPr>
+          <p:nvPr/>
+        </p:nvPicPr>
+        <p:blipFill>
+          <a:blip r:embed="rId2"/>
+          <a:stretch>
+            <a:fillRect/>
+          </a:stretch>
+        </p:blipFill>
+        <p:spPr>
+          <a:xfrm>
+            <a:off x="551856" y="713232"/>
+            <a:ext cx="11087983" cy="5532120"/>
+          </a:xfrm>
+          <a:prstGeom prst="rect">
+            <a:avLst/>
+          </a:prstGeom>
+        </p:spPr>
+      </p:pic>
+      <p:sp>
+        <p:nvSpPr>
+          <p:cNvPr id="4" name="edge:caption"/>
           <p:cNvSpPr txBox="1"/>
           <p:nvPr/>
         </p:nvSpPr>
         <p:spPr>
           <a:xfrm>
-            <a:off x="822960" y="2522093"/>
-            <a:ext cx="10801807" cy="385762"/>
+            <a:off x="228600" y="6300216"/>
+            <a:ext cx="11734495" cy="310896"/>
           </a:xfrm>
           <a:prstGeom prst="rect">
             <a:avLst/>
@@ -25808,336 +23243,24 @@
           </a:bodyPr>
           <a:lstStyle/>
           <a:p>
-            <a:pPr>
-              <a:lnSpc>
-                <a:spcPct val="130000"/>
-              </a:lnSpc>
-            </a:pPr>
-            <a:r>
-              <a:rPr sz="1500">
-                <a:solidFill>
-                  <a:srgbClr val="33221E"/>
-                </a:solidFill>
-                <a:latin typeface="Avenir Next"/>
-                <a:ea typeface="Hiragino Sans"/>
-                <a:cs typeface="Hiragino Sans"/>
-              </a:rPr>
-              <a:t>線路は直列アドミタンス y_ij = 1/z_ij。両端の電圧差に比例した電流が流れる（オームの法則）。</a:t>
-            </a:r>
-          </a:p>
-        </p:txBody>
-      </p:sp>
-      <p:sp>
-        <p:nvSpPr>
-          <p:cNvPr id="5" name="Rectangle 4"/>
-          <p:cNvSpPr/>
-          <p:nvPr/>
-        </p:nvSpPr>
-        <p:spPr>
-          <a:xfrm>
-            <a:off x="566928" y="3059747"/>
-            <a:ext cx="11057839" cy="9525"/>
-          </a:xfrm>
-          <a:prstGeom prst="rect">
-            <a:avLst/>
-          </a:prstGeom>
-          <a:solidFill>
-            <a:srgbClr val="E5DCCE"/>
-          </a:solidFill>
-          <a:ln>
-            <a:noFill/>
-          </a:ln>
-          <a:effectLst/>
-        </p:spPr>
-        <p:style>
-          <a:lnRef idx="1">
-            <a:schemeClr val="accent1"/>
-          </a:lnRef>
-          <a:fillRef idx="3">
-            <a:schemeClr val="accent1"/>
-          </a:fillRef>
-          <a:effectRef idx="2">
-            <a:schemeClr val="accent1"/>
-          </a:effectRef>
-          <a:fontRef idx="minor">
-            <a:schemeClr val="lt1"/>
-          </a:fontRef>
-        </p:style>
-        <p:txBody>
-          <a:bodyPr rtlCol="0" anchor="ctr"/>
-          <a:lstStyle/>
-          <a:p>
             <a:pPr algn="ctr"/>
-          </a:p>
-        </p:txBody>
-      </p:sp>
-      <p:sp>
-        <p:nvSpPr>
-          <p:cNvPr id="6" name="build:ghost"/>
-          <p:cNvSpPr txBox="1"/>
-          <p:nvPr/>
-        </p:nvSpPr>
-        <p:spPr>
-          <a:xfrm>
-            <a:off x="566928" y="3237039"/>
-            <a:ext cx="11057839" cy="254000"/>
-          </a:xfrm>
-          <a:prstGeom prst="rect">
-            <a:avLst/>
-          </a:prstGeom>
-          <a:noFill/>
-        </p:spPr>
-        <p:txBody>
-          <a:bodyPr wrap="none" lIns="0" rIns="0" tIns="0" bIns="0">
-            <a:noAutofit/>
-          </a:bodyPr>
-          <a:lstStyle/>
-          <a:p>
-            <a:r>
-              <a:rPr sz="1600" b="1">
-                <a:solidFill>
-                  <a:srgbClr val="C1C9C5"/>
-                </a:solidFill>
-                <a:latin typeface="Avenir Next"/>
-                <a:ea typeface="Hiragino Sans"/>
-                <a:cs typeface="Hiragino Sans"/>
-              </a:rPr>
-              <a:t>② 母線の収支｜注入電流 I_i = Σ_j I_ij（電流則）</a:t>
-            </a:r>
-          </a:p>
-        </p:txBody>
-      </p:sp>
-      <p:sp>
-        <p:nvSpPr>
-          <p:cNvPr id="7" name="build:ghost"/>
-          <p:cNvSpPr txBox="1"/>
-          <p:nvPr/>
-        </p:nvSpPr>
-        <p:spPr>
-          <a:xfrm>
-            <a:off x="822960" y="3529139"/>
-            <a:ext cx="10801807" cy="695325"/>
-          </a:xfrm>
-          <a:prstGeom prst="rect">
-            <a:avLst/>
-          </a:prstGeom>
-          <a:noFill/>
-        </p:spPr>
-        <p:txBody>
-          <a:bodyPr wrap="square" lIns="0" rIns="0" tIns="0" bIns="0">
-            <a:noAutofit/>
-          </a:bodyPr>
-          <a:lstStyle/>
-          <a:p>
-            <a:pPr>
-              <a:lnSpc>
-                <a:spcPct val="130000"/>
-              </a:lnSpc>
-            </a:pPr>
-            <a:r>
-              <a:rPr sz="1500">
-                <a:solidFill>
-                  <a:srgbClr val="C1BCBB"/>
-                </a:solidFill>
-                <a:latin typeface="Avenir Next"/>
-                <a:ea typeface="Hiragino Sans"/>
-                <a:cs typeface="Hiragino Sans"/>
-              </a:rPr>
-              <a:t>外から注入した電流は、つながる線路に全部分かれる。I_i = (Σ_j y_ij) V_i − Σ_j y_ij V_j。</a:t>
-            </a:r>
-            <a:r>
-              <a:rPr sz="1500" b="1">
-                <a:solidFill>
-                  <a:srgbClr val="C1BCBB"/>
-                </a:solidFill>
-                <a:latin typeface="Avenir Next"/>
-                <a:ea typeface="Hiragino Sans"/>
-                <a:cs typeface="Hiragino Sans"/>
-              </a:rPr>
-              <a:t>V_i の係数が対角、V_j の係数が非対角</a:t>
-            </a:r>
-            <a:r>
-              <a:rPr sz="1500">
-                <a:solidFill>
-                  <a:srgbClr val="C1BCBB"/>
-                </a:solidFill>
-                <a:latin typeface="Avenir Next"/>
-                <a:ea typeface="Hiragino Sans"/>
-                <a:cs typeface="Hiragino Sans"/>
-              </a:rPr>
-              <a:t>。</a:t>
-            </a:r>
-          </a:p>
-        </p:txBody>
-      </p:sp>
-      <p:sp>
-        <p:nvSpPr>
-          <p:cNvPr id="8" name="Rectangle 7"/>
-          <p:cNvSpPr/>
-          <p:nvPr/>
-        </p:nvSpPr>
-        <p:spPr>
-          <a:xfrm>
-            <a:off x="566928" y="4376356"/>
-            <a:ext cx="11057839" cy="9525"/>
-          </a:xfrm>
-          <a:prstGeom prst="rect">
-            <a:avLst/>
-          </a:prstGeom>
-          <a:solidFill>
-            <a:srgbClr val="E5DCCE"/>
-          </a:solidFill>
-          <a:ln>
-            <a:noFill/>
-          </a:ln>
-          <a:effectLst/>
-        </p:spPr>
-        <p:style>
-          <a:lnRef idx="1">
-            <a:schemeClr val="accent1"/>
-          </a:lnRef>
-          <a:fillRef idx="3">
-            <a:schemeClr val="accent1"/>
-          </a:fillRef>
-          <a:effectRef idx="2">
-            <a:schemeClr val="accent1"/>
-          </a:effectRef>
-          <a:fontRef idx="minor">
-            <a:schemeClr val="lt1"/>
-          </a:fontRef>
-        </p:style>
-        <p:txBody>
-          <a:bodyPr rtlCol="0" anchor="ctr"/>
-          <a:lstStyle/>
-          <a:p>
-            <a:pPr algn="ctr"/>
-          </a:p>
-        </p:txBody>
-      </p:sp>
-      <p:sp>
-        <p:nvSpPr>
-          <p:cNvPr id="9" name="build:ghost"/>
-          <p:cNvSpPr txBox="1"/>
-          <p:nvPr/>
-        </p:nvSpPr>
-        <p:spPr>
-          <a:xfrm>
-            <a:off x="566928" y="4553648"/>
-            <a:ext cx="11057839" cy="254000"/>
-          </a:xfrm>
-          <a:prstGeom prst="rect">
-            <a:avLst/>
-          </a:prstGeom>
-          <a:noFill/>
-        </p:spPr>
-        <p:txBody>
-          <a:bodyPr wrap="none" lIns="0" rIns="0" tIns="0" bIns="0">
-            <a:noAutofit/>
-          </a:bodyPr>
-          <a:lstStyle/>
-          <a:p>
-            <a:r>
-              <a:rPr sz="1600" b="1">
-                <a:solidFill>
-                  <a:srgbClr val="C1C9C5"/>
-                </a:solidFill>
-                <a:latin typeface="Avenir Next"/>
-                <a:ea typeface="Hiragino Sans"/>
-                <a:cs typeface="Hiragino Sans"/>
-              </a:rPr>
-              <a:t>③ 並べる｜Y_ii = Σ_j y_ij + 対地分、Y_ij = −y_ij → I = Y_bus V</a:t>
-            </a:r>
-          </a:p>
-        </p:txBody>
-      </p:sp>
-      <p:sp>
-        <p:nvSpPr>
-          <p:cNvPr id="10" name="build:ghost"/>
-          <p:cNvSpPr txBox="1"/>
-          <p:nvPr/>
-        </p:nvSpPr>
-        <p:spPr>
-          <a:xfrm>
-            <a:off x="822960" y="4845748"/>
-            <a:ext cx="10801807" cy="385762"/>
-          </a:xfrm>
-          <a:prstGeom prst="rect">
-            <a:avLst/>
-          </a:prstGeom>
-          <a:noFill/>
-        </p:spPr>
-        <p:txBody>
-          <a:bodyPr wrap="square" lIns="0" rIns="0" tIns="0" bIns="0">
-            <a:noAutofit/>
-          </a:bodyPr>
-          <a:lstStyle/>
-          <a:p>
-            <a:pPr>
-              <a:lnSpc>
-                <a:spcPct val="130000"/>
-              </a:lnSpc>
-            </a:pPr>
-            <a:r>
-              <a:rPr sz="1500">
-                <a:solidFill>
-                  <a:srgbClr val="C1BCBB"/>
-                </a:solidFill>
-                <a:latin typeface="Avenir Next"/>
-                <a:ea typeface="Hiragino Sans"/>
-                <a:cs typeface="Hiragino Sans"/>
-              </a:rPr>
-              <a:t>全母線分を縦に並べると行列の式になる。対称（Y_ij = Y_ji）で、線路のない i–j は 0。</a:t>
-            </a:r>
-            <a:r>
-              <a:rPr sz="1500" b="1">
-                <a:solidFill>
-                  <a:srgbClr val="C1BCBB"/>
-                </a:solidFill>
-                <a:latin typeface="Avenir Next"/>
-                <a:ea typeface="Hiragino Sans"/>
-                <a:cs typeface="Hiragino Sans"/>
-              </a:rPr>
-              <a:t>疎</a:t>
-            </a:r>
-            <a:r>
-              <a:rPr sz="1500">
-                <a:solidFill>
-                  <a:srgbClr val="C1BCBB"/>
-                </a:solidFill>
-                <a:latin typeface="Avenir Next"/>
-                <a:ea typeface="Hiragino Sans"/>
-                <a:cs typeface="Hiragino Sans"/>
-              </a:rPr>
-              <a:t> で </a:t>
-            </a:r>
-            <a:r>
-              <a:rPr sz="1500" b="1">
-                <a:solidFill>
-                  <a:srgbClr val="C1BCBB"/>
-                </a:solidFill>
-                <a:latin typeface="Avenir Next"/>
-                <a:ea typeface="Hiragino Sans"/>
-                <a:cs typeface="Hiragino Sans"/>
-              </a:rPr>
-              <a:t>対称</a:t>
-            </a:r>
-            <a:r>
-              <a:rPr sz="1500">
-                <a:solidFill>
-                  <a:srgbClr val="C1BCBB"/>
-                </a:solidFill>
-                <a:latin typeface="Avenir Next"/>
-                <a:ea typeface="Hiragino Sans"/>
-                <a:cs typeface="Hiragino Sans"/>
-              </a:rPr>
-              <a:t> はここから来る。</a:t>
-            </a:r>
-          </a:p>
-        </p:txBody>
-      </p:sp>
-      <p:sp>
-        <p:nvSpPr>
-          <p:cNvPr id="11" name="TextBox 10"/>
+            <a:r>
+              <a:rPr sz="1400">
+                <a:solidFill>
+                  <a:srgbClr val="71635B"/>
+                </a:solidFill>
+                <a:latin typeface="Avenir Next"/>
+                <a:ea typeface="Hiragino Sans"/>
+                <a:cs typeface="Hiragino Sans"/>
+              </a:rPr>
+              <a:t>線路は直列アドミタンス y_ij = 1/z_ij。両端の電圧差に比例した電流が流れる（オームの法則）。　出典｜コード/fig_ch04.py</a:t>
+            </a:r>
+          </a:p>
+        </p:txBody>
+      </p:sp>
+      <p:sp>
+        <p:nvSpPr>
+          <p:cNvPr id="5" name="TextBox 4"/>
           <p:cNvSpPr txBox="1"/>
           <p:nvPr/>
         </p:nvSpPr>
